--- a/lessons/btli101_xrw5fg/btli1_l4_slides.pptx
+++ b/lessons/btli101_xrw5fg/btli1_l4_slides.pptx
@@ -7,6 +7,7 @@
   <p:sldIdLst>
     <p:sldId id="256" r:id="rId2"/>
     <p:sldId id="257" r:id="rId3"/>
+    <p:sldId id="272" r:id="rId23"/>
     <p:sldId id="258" r:id="rId4"/>
     <p:sldId id="259" r:id="rId5"/>
     <p:sldId id="260" r:id="rId6"/>
@@ -15,11 +16,15 @@
     <p:sldId id="263" r:id="rId9"/>
     <p:sldId id="264" r:id="rId10"/>
     <p:sldId id="265" r:id="rId11"/>
+    <p:sldId id="273" r:id="rId24"/>
+    <p:sldId id="274" r:id="rId25"/>
     <p:sldId id="266" r:id="rId12"/>
     <p:sldId id="267" r:id="rId13"/>
     <p:sldId id="268" r:id="rId14"/>
     <p:sldId id="269" r:id="rId15"/>
     <p:sldId id="270" r:id="rId16"/>
+    <p:sldId id="275" r:id="rId26"/>
+    <p:sldId id="276" r:id="rId27"/>
     <p:sldId id="271" r:id="rId17"/>
   </p:sldIdLst>
   <p:notesMasterIdLst>
@@ -517,9 +522,20 @@
           <a:p>
             <a:r>
               <a:rPr lang="en-US" dirty="0"/>
-              <a:t>Title slide. Opening prayer. Sa lesson 4 na tayo. Mention: "Ito ang first lesson natin tungkol sa specific Christian character." L1-L3 was about spiritual disciplines (prayer, meditation, surrender); L4 onward begins to be about formed character.</a:t>
-            </a:r>
-            <a:endParaRPr lang="en-US" dirty="0"/>
+              <a:t>TITLE — Opening prayer. "Sa Lesson 4 na tayo. Ito ang unang lesson tungkol sa specific Christian character."</a:t>
+            </a:r>
+          </a:p>
+          <a:p>
+            <a:r>
+              <a:rPr lang="en-US" dirty="0"/>
+              <a:t>L1–L3 = spiritual disciplines (prayer, meditation, surrender). L4 onward = formed character. Character anchor: Goodness (Kabutihan) — Galatians 5:22-23.</a:t>
+            </a:r>
+          </a:p>
+          <a:p>
+            <a:r>
+              <a:rPr lang="en-US" dirty="0"/>
+              <a:t>Duration ~55 min: Pukaw 5 · Tanaw 8 · Tuklas 18 · Talakay 12 · Tugon 7 · Dalhin 5. Memory verse: 1 Peter 1:15-16.</a:t>
+            </a:r>
           </a:p>
         </p:txBody>
       </p:sp>
@@ -605,9 +621,14 @@
           <a:p>
             <a:r>
               <a:rPr lang="en-US" dirty="0"/>
-              <a:t>CHARACTER ANCHOR — Goodness (Kabutihan). Explain: Goodness = moral excellence flowing visibly. Hindi private virtue lang — kabutihan na NAKIKITA. Holiness as outward radiance.</a:t>
-            </a:r>
-            <a:endParaRPr lang="en-US" dirty="0"/>
+              <a:t>TUKLAS · Character Anchor — Goodness (Kabutihan), Galatians 5:22-23. Moral excellence na NAKIKITA — flowing visibly outward. Hindi private virtue lang.</a:t>
+            </a:r>
+          </a:p>
+          <a:p>
+            <a:r>
+              <a:rPr lang="en-US" dirty="0"/>
+              <a:t>Holiness as outward radiance — lighthouse, hindi nakatagong ilaw. Ito ang tulay papunta sa TUGON at DALHIN (holiness as testimony).</a:t>
+            </a:r>
           </a:p>
         </p:txBody>
       </p:sp>
@@ -693,9 +714,20 @@
           <a:p>
             <a:r>
               <a:rPr lang="en-US" dirty="0"/>
-              <a:t>THE FIRST DEEP QUESTION. Most sensitive moment of the lesson. Volunteer basis. Walang pressure. Pause. Wait. Salamat sa mag-share. Walang advice.</a:t>
-            </a:r>
-            <a:endParaRPr lang="en-US" dirty="0"/>
+              <a:t>TALAKAY · Q1 (6 min, kasama ang 1-min tone-setting). PARTICIPANT GUIDE QUESTION. Ito ang pinaka-sensitibong bahagi.</a:t>
+            </a:r>
+          </a:p>
+          <a:p>
+            <a:r>
+              <a:rPr lang="en-US" dirty="0"/>
+              <a:t>SET TONE: "Mag-share lang kung komportable. Lahat ng sasabihin dito — confidential. Walang gossip, walang spread. Kung hindi pa kaya, sumulat sa workbook — ang Dios ang basahin."</a:t>
+            </a:r>
+          </a:p>
+          <a:p>
+            <a:r>
+              <a:rPr lang="en-US" dirty="0"/>
+              <a:t>PITFALL: Huwag mag-react nang sobra. Salubungin sa PAKIKINIG, hindi pag-aral. Walang sermon, walang advice agad — ipagdasal lang sa loob. "Salamat sa pagtitiwala. Ipagdarasal kita."</a:t>
+            </a:r>
           </a:p>
         </p:txBody>
       </p:sp>
@@ -781,9 +813,20 @@
           <a:p>
             <a:r>
               <a:rPr lang="en-US" dirty="0"/>
-              <a:t>Second question is safer + more practical. Encourage sharing of measures — these become collective wisdom for the LCG. Maaaring magsulat sa whiteboard ng list ng effective measures na lumabas.</a:t>
-            </a:r>
-            <a:endParaRPr lang="en-US" dirty="0"/>
+              <a:t>TALAKAY · Q2 (6 min). PARTICIPANT GUIDE QUESTION — mas comfortable at practical: anong 'measures' ang ginagawa mo?</a:t>
+            </a:r>
+          </a:p>
+          <a:p>
+            <a:r>
+              <a:rPr lang="en-US" dirty="0"/>
+              <a:t>Halimbawa: accountability partner, blocked websites, schedule changes, godly community, Scripture memory, fasting.</a:t>
+            </a:r>
+          </a:p>
+          <a:p>
+            <a:r>
+              <a:rPr lang="en-US" dirty="0"/>
+              <a:t>CUE: Encourage sharing — ang measures na nakakatulong sa iba ay magiging inspiration sa lahat. Pwedeng magsulat sa whiteboard ng listahan ng effective measures — collective wisdom ng grupo.</a:t>
+            </a:r>
           </a:p>
         </p:txBody>
       </p:sp>
@@ -869,9 +912,14 @@
           <a:p>
             <a:r>
               <a:rPr lang="en-US" dirty="0"/>
-              <a:t>MOODY QUOTE. Anchor for TUGON. Lighthouses don't make noise. Holiness ay kuwiet — pero matingkad.</a:t>
-            </a:r>
-            <a:endParaRPr lang="en-US" dirty="0"/>
+              <a:t>TUGON · Moody quote (2 min). "A holy life is the most effective testimony. Lighthouses don't fire cannons — they just shine."</a:t>
+            </a:r>
+          </a:p>
+          <a:p>
+            <a:r>
+              <a:rPr lang="en-US" dirty="0"/>
+              <a:t>FRAME: "Kabutihan, kapag tunay, ay kuwiet. Hindi mo kailangang ibandera ang holiness mo. Kapag dalisay ang puso, makikita ito ng mundo — at ito ang pinakamalakas na testimony para sa Panginoon."</a:t>
+            </a:r>
           </a:p>
         </p:txBody>
       </p:sp>
@@ -957,9 +1005,14 @@
           <a:p>
             <a:r>
               <a:rPr lang="en-US" dirty="0"/>
-              <a:t>5 MINUTES OF SILENT WRITING. Do not rush. Hindi awkward — sacred. Background music optional (instrumental). No one is forced to share what they wrote.</a:t>
-            </a:r>
-            <a:endParaRPr lang="en-US" dirty="0"/>
+              <a:t>TUGON · Silent prayer-writing (5 min). PARTICIPANT GUIDE QUESTION. Sumulat ng personal prayer — paghingi ng habag, awa, biyaya. Background music optional (instrumental hymn).</a:t>
+            </a:r>
+          </a:p>
+          <a:p>
+            <a:r>
+              <a:rPr lang="en-US" dirty="0"/>
+              <a:t>Ang quietness ay PART OF THE CURRICULUM — hindi awkward, hindi nakaka-stress. Wag i-rush. Hindi i-share (sa pagitan ng disciple at ng Dios), pero pwedeng mag-invite ng volunteer na magbasa bilang sample.</a:t>
+            </a:r>
           </a:p>
         </p:txBody>
       </p:sp>
@@ -1045,9 +1098,20 @@
           <a:p>
             <a:r>
               <a:rPr lang="en-US" dirty="0"/>
-              <a:t>DALHIN. Pick 1 area (SRPIU). Spoken Pangako Ko (yung gusto). 7-day journal. EOLO bridge — holiness as testimony.</a:t>
-            </a:r>
-            <a:endParaRPr lang="en-US" dirty="0"/>
+              <a:t>DALHIN · Carry Home (2 min). Pumili ng ISANG area (S/R/P/I/U) na pinaka-kailangan ng grasya ngayong linggo. I-share ang area — hindi ang kasalanan.</a:t>
+            </a:r>
+          </a:p>
+          <a:p>
+            <a:r>
+              <a:rPr lang="en-US" dirty="0"/>
+              <a:t>CUE: Mas safe: "Pananalita ang aking pinili" kesa "madalas akong nagsisinungaling." Pareho ang substansya, accountability-friendly ang una.</a:t>
+            </a:r>
+          </a:p>
+          <a:p>
+            <a:r>
+              <a:rPr lang="en-US" dirty="0"/>
+              <a:t>Pangako Ko ritual: sumulat ng specific commitment, basahin ng malakas (kung gusto). Sa Filipino disciple-making, ang spoken commitment na may saksi ay mas binding. 7-day journal + EOLO bridge.</a:t>
+            </a:r>
           </a:p>
         </p:txBody>
       </p:sp>
@@ -1133,9 +1197,14 @@
           <a:p>
             <a:r>
               <a:rPr lang="en-US" dirty="0"/>
-              <a:t>MEMORY VERSE recite together. Pakialaman: ang holiness ay TAWAG, hindi achievement. Holy because He is holy. Close with prayer. Mention next week: Lesson 5.</a:t>
-            </a:r>
-            <a:endParaRPr lang="en-US" dirty="0"/>
+              <a:t>MEMORY VERSE — recite together. 1 Peter 1:15-16 (MBB): "Dahil ang Diyos na pumili sa inyo ay banal, dapat din kayong magpakabanal sa lahat ng inyong ginagawa, sapagkat nasusulat, 'Magpakabanal kayo, sapagkat ako'y banal.'"</a:t>
+            </a:r>
+          </a:p>
+          <a:p>
+            <a:r>
+              <a:rPr lang="en-US" dirty="0"/>
+              <a:t>Pakialaman: ang holiness ay TAWAG, hindi achievement — holy BECAUSE He is holy. Close with prayer. Tease Lesson 5 next week.</a:t>
+            </a:r>
           </a:p>
         </p:txBody>
       </p:sp>
@@ -1157,6 +1226,285 @@
             <a:fld id="{F7021451-1387-4CA6-816F-3879F97B5CBC}" type="slidenum">
               <a:rPr lang="en-US"/>
               <a:t>16</a:t>
+            </a:fld>
+            <a:endParaRPr lang="en-US"/>
+          </a:p>
+        </p:txBody>
+      </p:sp>
+    </p:spTree>
+    <p:extLst>
+      <p:ext uri="{BB962C8B-B14F-4D97-AF65-F5344CB8AC3E}">
+        <p14:creationId xmlns:p14="http://schemas.microsoft.com/office/powerpoint/2010/main" val="1024086991"/>
+      </p:ext>
+    </p:extLst>
+  </p:cSld>
+  <p:clrMapOvr>
+    <a:masterClrMapping/>
+  </p:clrMapOvr>
+</p:notes>
+</file>
+
+<file path=ppt/notesSlides/notesSlide17.xml><?xml version="1.0" encoding="utf-8"?>
+<p:notes xmlns:a="http://schemas.openxmlformats.org/drawingml/2006/main" xmlns:r="http://schemas.openxmlformats.org/officeDocument/2006/relationships" xmlns:p="http://schemas.openxmlformats.org/presentationml/2006/main">
+  <p:cSld>
+    <p:spTree>
+      <p:nvGrpSpPr>
+        <p:cNvPr id="1" name=""/>
+        <p:cNvGrpSpPr/>
+        <p:nvPr/>
+      </p:nvGrpSpPr>
+      <p:grpSpPr>
+        <a:xfrm>
+          <a:off x="0" y="0"/>
+          <a:ext cx="0" cy="0"/>
+          <a:chOff x="0" y="0"/>
+          <a:chExt cx="0" cy="0"/>
+        </a:xfrm>
+      </p:grpSpPr>
+      <p:sp>
+        <p:nvSpPr>
+          <p:cNvPr id="2" name="Slide Image Placeholder 1"/>
+          <p:cNvSpPr>
+            <a:spLocks noGrp="1" noRot="1" noChangeAspect="1"/>
+          </p:cNvSpPr>
+          <p:nvPr>
+            <p:ph type="sldImg"/>
+          </p:nvPr>
+        </p:nvSpPr>
+        <p:spPr/>
+      </p:sp>
+      <p:sp>
+        <p:nvSpPr>
+          <p:cNvPr id="3" name="Notes Placeholder 2"/>
+          <p:cNvSpPr>
+            <a:spLocks noGrp="1"/>
+          </p:cNvSpPr>
+          <p:nvPr>
+            <p:ph type="body" idx="1"/>
+          </p:nvPr>
+        </p:nvSpPr>
+        <p:spPr/>
+        <p:txBody>
+          <a:bodyPr/>
+          <a:lstStyle/>
+          <a:p>
+            <a:r>
+              <a:rPr lang="en-US" dirty="0"/>
+              <a:t>PUKAW · Step 2 (2 min). Sasagutan sa workbook ang DAHILAN ng rating. Hindi pa i-share — pansariling pagninilay lang.</a:t>
+            </a:r>
+          </a:p>
+          <a:p>
+            <a:r>
+              <a:rPr lang="en-US" dirty="0"/>
+              <a:t>Ang tanong na ito ang nagpapalalim ng self-snapshot: hindi lang numero kundi kalagayan ng puso. Hayaan silang tapat sa sarili.</a:t>
+            </a:r>
+          </a:p>
+        </p:txBody>
+      </p:sp>
+      <p:sp>
+        <p:nvSpPr>
+          <p:cNvPr id="4" name="Slide Number Placeholder 3"/>
+          <p:cNvSpPr>
+            <a:spLocks noGrp="1"/>
+          </p:cNvSpPr>
+          <p:nvPr>
+            <p:ph type="sldNum" sz="quarter" idx="10"/>
+          </p:nvPr>
+        </p:nvSpPr>
+        <p:spPr/>
+        <p:txBody>
+          <a:bodyPr/>
+          <a:lstStyle/>
+          <a:p>
+            <a:fld id="{F7021451-1387-4CA6-816F-3879F97B5CBC}" type="slidenum">
+              <a:rPr lang="en-US"/>
+              <a:t>4</a:t>
+            </a:fld>
+            <a:endParaRPr lang="en-US"/>
+          </a:p>
+        </p:txBody>
+      </p:sp>
+    </p:spTree>
+    <p:extLst>
+      <p:ext uri="{BB962C8B-B14F-4D97-AF65-F5344CB8AC3E}">
+        <p14:creationId xmlns:p14="http://schemas.microsoft.com/office/powerpoint/2010/main" val="1024086991"/>
+      </p:ext>
+    </p:extLst>
+  </p:cSld>
+  <p:clrMapOvr>
+    <a:masterClrMapping/>
+  </p:clrMapOvr>
+</p:notes>
+</file>
+
+<file path=ppt/notesSlides/notesSlide18.xml><?xml version="1.0" encoding="utf-8"?>
+<p:notes xmlns:a="http://schemas.openxmlformats.org/drawingml/2006/main" xmlns:r="http://schemas.openxmlformats.org/officeDocument/2006/relationships" xmlns:p="http://schemas.openxmlformats.org/presentationml/2006/main">
+  <p:cSld>
+    <p:spTree>
+      <p:nvGrpSpPr>
+        <p:cNvPr id="1" name=""/>
+        <p:cNvGrpSpPr/>
+        <p:nvPr/>
+      </p:nvGrpSpPr>
+      <p:grpSpPr>
+        <a:xfrm>
+          <a:off x="0" y="0"/>
+          <a:ext cx="0" cy="0"/>
+          <a:chOff x="0" y="0"/>
+          <a:chExt cx="0" cy="0"/>
+        </a:xfrm>
+      </p:grpSpPr>
+      <p:sp>
+        <p:nvSpPr>
+          <p:cNvPr id="2" name="Slide Image Placeholder 1"/>
+          <p:cNvSpPr>
+            <a:spLocks noGrp="1" noRot="1" noChangeAspect="1"/>
+          </p:cNvSpPr>
+          <p:nvPr>
+            <p:ph type="sldImg"/>
+          </p:nvPr>
+        </p:nvSpPr>
+        <p:spPr/>
+      </p:sp>
+      <p:sp>
+        <p:nvSpPr>
+          <p:cNvPr id="3" name="Notes Placeholder 2"/>
+          <p:cNvSpPr>
+            <a:spLocks noGrp="1"/>
+          </p:cNvSpPr>
+          <p:nvPr>
+            <p:ph type="body" idx="1"/>
+          </p:nvPr>
+        </p:nvSpPr>
+        <p:spPr/>
+        <p:txBody>
+          <a:bodyPr/>
+          <a:lstStyle/>
+          <a:p>
+            <a:r>
+              <a:rPr lang="en-US" dirty="0"/>
+              <a:t>TUKLAS reflection (1 min) — PARTICIPANT GUIDE QUESTION. "Komportable ka bang tawaging 'banal' (saint)?"</a:t>
+            </a:r>
+          </a:p>
+          <a:p>
+            <a:r>
+              <a:rPr lang="en-US" dirty="0"/>
+              <a:t>Layunin: harapin ang awkwardness ng Filipino context (santo = rebulto). Ang katotohanan: isa kang saint DAHIL kay Christ — positional, hindi achievement. 1–2 boluntaryong share lang.</a:t>
+            </a:r>
+          </a:p>
+        </p:txBody>
+      </p:sp>
+      <p:sp>
+        <p:nvSpPr>
+          <p:cNvPr id="4" name="Slide Number Placeholder 3"/>
+          <p:cNvSpPr>
+            <a:spLocks noGrp="1"/>
+          </p:cNvSpPr>
+          <p:nvPr>
+            <p:ph type="sldNum" sz="quarter" idx="10"/>
+          </p:nvPr>
+        </p:nvSpPr>
+        <p:spPr/>
+        <p:txBody>
+          <a:bodyPr/>
+          <a:lstStyle/>
+          <a:p>
+            <a:fld id="{F7021451-1387-4CA6-816F-3879F97B5CBC}" type="slidenum">
+              <a:rPr lang="en-US"/>
+              <a:t>4</a:t>
+            </a:fld>
+            <a:endParaRPr lang="en-US"/>
+          </a:p>
+        </p:txBody>
+      </p:sp>
+    </p:spTree>
+    <p:extLst>
+      <p:ext uri="{BB962C8B-B14F-4D97-AF65-F5344CB8AC3E}">
+        <p14:creationId xmlns:p14="http://schemas.microsoft.com/office/powerpoint/2010/main" val="1024086991"/>
+      </p:ext>
+    </p:extLst>
+  </p:cSld>
+  <p:clrMapOvr>
+    <a:masterClrMapping/>
+  </p:clrMapOvr>
+</p:notes>
+</file>
+
+<file path=ppt/notesSlides/notesSlide19.xml><?xml version="1.0" encoding="utf-8"?>
+<p:notes xmlns:a="http://schemas.openxmlformats.org/drawingml/2006/main" xmlns:r="http://schemas.openxmlformats.org/officeDocument/2006/relationships" xmlns:p="http://schemas.openxmlformats.org/presentationml/2006/main">
+  <p:cSld>
+    <p:spTree>
+      <p:nvGrpSpPr>
+        <p:cNvPr id="1" name=""/>
+        <p:cNvGrpSpPr/>
+        <p:nvPr/>
+      </p:nvGrpSpPr>
+      <p:grpSpPr>
+        <a:xfrm>
+          <a:off x="0" y="0"/>
+          <a:ext cx="0" cy="0"/>
+          <a:chOff x="0" y="0"/>
+          <a:chExt cx="0" cy="0"/>
+        </a:xfrm>
+      </p:grpSpPr>
+      <p:sp>
+        <p:nvSpPr>
+          <p:cNvPr id="2" name="Slide Image Placeholder 1"/>
+          <p:cNvSpPr>
+            <a:spLocks noGrp="1" noRot="1" noChangeAspect="1"/>
+          </p:cNvSpPr>
+          <p:nvPr>
+            <p:ph type="sldImg"/>
+          </p:nvPr>
+        </p:nvSpPr>
+        <p:spPr/>
+      </p:sp>
+      <p:sp>
+        <p:nvSpPr>
+          <p:cNvPr id="3" name="Notes Placeholder 2"/>
+          <p:cNvSpPr>
+            <a:spLocks noGrp="1"/>
+          </p:cNvSpPr>
+          <p:nvPr>
+            <p:ph type="body" idx="1"/>
+          </p:nvPr>
+        </p:nvSpPr>
+        <p:spPr/>
+        <p:txBody>
+          <a:bodyPr/>
+          <a:lstStyle/>
+          <a:p>
+            <a:r>
+              <a:rPr lang="en-US" dirty="0"/>
+              <a:t>TUKLAS reflection (1 min) — PARTICIPANT GUIDE QUESTION. "Alin sa 5 areas (SRPIU) ang pinaka-kailangan ng grasya?"</a:t>
+            </a:r>
+          </a:p>
+          <a:p>
+            <a:r>
+              <a:rPr lang="en-US" dirty="0"/>
+              <a:t>Tahimik na isulat — ito ang tutulay sa DALHIN kung saan pipili sila ng isang area para sa 7-day watch. Walang forced share dito.</a:t>
+            </a:r>
+          </a:p>
+        </p:txBody>
+      </p:sp>
+      <p:sp>
+        <p:nvSpPr>
+          <p:cNvPr id="4" name="Slide Number Placeholder 3"/>
+          <p:cNvSpPr>
+            <a:spLocks noGrp="1"/>
+          </p:cNvSpPr>
+          <p:nvPr>
+            <p:ph type="sldNum" sz="quarter" idx="10"/>
+          </p:nvPr>
+        </p:nvSpPr>
+        <p:spPr/>
+        <p:txBody>
+          <a:bodyPr/>
+          <a:lstStyle/>
+          <a:p>
+            <a:fld id="{F7021451-1387-4CA6-816F-3879F97B5CBC}" type="slidenum">
+              <a:rPr lang="en-US"/>
+              <a:t>4</a:t>
             </a:fld>
             <a:endParaRPr lang="en-US"/>
           </a:p>
@@ -1221,9 +1569,20 @@
           <a:p>
             <a:r>
               <a:rPr lang="en-US" dirty="0"/>
-              <a:t>PUKAW snapshot. Give 2-3 minutes for the rating + reason. Hindi pa lahat mag-share. Sariling pagninilay lang. State clearly: "baseline lang ito; uulitin sa dulo."</a:t>
-            </a:r>
-            <a:endParaRPr lang="en-US" dirty="0"/>
+              <a:t>PUKAW · Self-Snapshot (3 min). Sariling sagot sa workbook — 1–10 rating sa PROGRESSIVE holiness. Walang i-share; sariling reading lang.</a:t>
+            </a:r>
+          </a:p>
+          <a:p>
+            <a:r>
+              <a:rPr lang="en-US" dirty="0"/>
+              <a:t>SCRIPT: "Sa positional holiness — anak ng Dios kay Christ — perfect 10 tayo lagi. Pero sa progressive — ang araw-araw — saan ka ngayon? 1–10? Honest lang. Walang condemnation, baseline lang. Sa dulo, babalikan natin."</a:t>
+            </a:r>
+          </a:p>
+          <a:p>
+            <a:r>
+              <a:rPr lang="en-US" dirty="0"/>
+              <a:t>CUE: Bigyan ng buong 3 minuto kahit parang matagal. Ito ang foundation ng buong lesson — honest self-reading bago anumang teaching.</a:t>
+            </a:r>
           </a:p>
         </p:txBody>
       </p:sp>
@@ -1245,6 +1604,192 @@
             <a:fld id="{F7021451-1387-4CA6-816F-3879F97B5CBC}" type="slidenum">
               <a:rPr lang="en-US"/>
               <a:t>2</a:t>
+            </a:fld>
+            <a:endParaRPr lang="en-US"/>
+          </a:p>
+        </p:txBody>
+      </p:sp>
+    </p:spTree>
+    <p:extLst>
+      <p:ext uri="{BB962C8B-B14F-4D97-AF65-F5344CB8AC3E}">
+        <p14:creationId xmlns:p14="http://schemas.microsoft.com/office/powerpoint/2010/main" val="1024086991"/>
+      </p:ext>
+    </p:extLst>
+  </p:cSld>
+  <p:clrMapOvr>
+    <a:masterClrMapping/>
+  </p:clrMapOvr>
+</p:notes>
+</file>
+
+<file path=ppt/notesSlides/notesSlide20.xml><?xml version="1.0" encoding="utf-8"?>
+<p:notes xmlns:a="http://schemas.openxmlformats.org/drawingml/2006/main" xmlns:r="http://schemas.openxmlformats.org/officeDocument/2006/relationships" xmlns:p="http://schemas.openxmlformats.org/presentationml/2006/main">
+  <p:cSld>
+    <p:spTree>
+      <p:nvGrpSpPr>
+        <p:cNvPr id="1" name=""/>
+        <p:cNvGrpSpPr/>
+        <p:nvPr/>
+      </p:nvGrpSpPr>
+      <p:grpSpPr>
+        <a:xfrm>
+          <a:off x="0" y="0"/>
+          <a:ext cx="0" cy="0"/>
+          <a:chOff x="0" y="0"/>
+          <a:chExt cx="0" cy="0"/>
+        </a:xfrm>
+      </p:grpSpPr>
+      <p:sp>
+        <p:nvSpPr>
+          <p:cNvPr id="2" name="Slide Image Placeholder 1"/>
+          <p:cNvSpPr>
+            <a:spLocks noGrp="1" noRot="1" noChangeAspect="1"/>
+          </p:cNvSpPr>
+          <p:nvPr>
+            <p:ph type="sldImg"/>
+          </p:nvPr>
+        </p:nvSpPr>
+        <p:spPr/>
+      </p:sp>
+      <p:sp>
+        <p:nvSpPr>
+          <p:cNvPr id="3" name="Notes Placeholder 2"/>
+          <p:cNvSpPr>
+            <a:spLocks noGrp="1"/>
+          </p:cNvSpPr>
+          <p:nvPr>
+            <p:ph type="body" idx="1"/>
+          </p:nvPr>
+        </p:nvSpPr>
+        <p:spPr/>
+        <p:txBody>
+          <a:bodyPr/>
+          <a:lstStyle/>
+          <a:p>
+            <a:r>
+              <a:rPr lang="en-US" dirty="0"/>
+              <a:t>DALHIN · EOLO bridge (1 min) — PARTICIPANT GUIDE QUESTION. Ang pursuit ng kabanalan ay TESTIMONY.</a:t>
+            </a:r>
+          </a:p>
+          <a:p>
+            <a:r>
+              <a:rPr lang="en-US" dirty="0"/>
+              <a:t>"Ang EOLO person mo ay nakatingin sa Monday–Saturday mo, hindi sa Sunday lang. Anong surrendered/holy action ang makikita niya ngayong linggo?" I-encourage na mag-text sa accountability partner sa loob ng 24 oras.</a:t>
+            </a:r>
+          </a:p>
+        </p:txBody>
+      </p:sp>
+      <p:sp>
+        <p:nvSpPr>
+          <p:cNvPr id="4" name="Slide Number Placeholder 3"/>
+          <p:cNvSpPr>
+            <a:spLocks noGrp="1"/>
+          </p:cNvSpPr>
+          <p:nvPr>
+            <p:ph type="sldNum" sz="quarter" idx="10"/>
+          </p:nvPr>
+        </p:nvSpPr>
+        <p:spPr/>
+        <p:txBody>
+          <a:bodyPr/>
+          <a:lstStyle/>
+          <a:p>
+            <a:fld id="{F7021451-1387-4CA6-816F-3879F97B5CBC}" type="slidenum">
+              <a:rPr lang="en-US"/>
+              <a:t>4</a:t>
+            </a:fld>
+            <a:endParaRPr lang="en-US"/>
+          </a:p>
+        </p:txBody>
+      </p:sp>
+    </p:spTree>
+    <p:extLst>
+      <p:ext uri="{BB962C8B-B14F-4D97-AF65-F5344CB8AC3E}">
+        <p14:creationId xmlns:p14="http://schemas.microsoft.com/office/powerpoint/2010/main" val="1024086991"/>
+      </p:ext>
+    </p:extLst>
+  </p:cSld>
+  <p:clrMapOvr>
+    <a:masterClrMapping/>
+  </p:clrMapOvr>
+</p:notes>
+</file>
+
+<file path=ppt/notesSlides/notesSlide21.xml><?xml version="1.0" encoding="utf-8"?>
+<p:notes xmlns:a="http://schemas.openxmlformats.org/drawingml/2006/main" xmlns:r="http://schemas.openxmlformats.org/officeDocument/2006/relationships" xmlns:p="http://schemas.openxmlformats.org/presentationml/2006/main">
+  <p:cSld>
+    <p:spTree>
+      <p:nvGrpSpPr>
+        <p:cNvPr id="1" name=""/>
+        <p:cNvGrpSpPr/>
+        <p:nvPr/>
+      </p:nvGrpSpPr>
+      <p:grpSpPr>
+        <a:xfrm>
+          <a:off x="0" y="0"/>
+          <a:ext cx="0" cy="0"/>
+          <a:chOff x="0" y="0"/>
+          <a:chExt cx="0" cy="0"/>
+        </a:xfrm>
+      </p:grpSpPr>
+      <p:sp>
+        <p:nvSpPr>
+          <p:cNvPr id="2" name="Slide Image Placeholder 1"/>
+          <p:cNvSpPr>
+            <a:spLocks noGrp="1" noRot="1" noChangeAspect="1"/>
+          </p:cNvSpPr>
+          <p:nvPr>
+            <p:ph type="sldImg"/>
+          </p:nvPr>
+        </p:nvSpPr>
+        <p:spPr/>
+      </p:sp>
+      <p:sp>
+        <p:nvSpPr>
+          <p:cNvPr id="3" name="Notes Placeholder 2"/>
+          <p:cNvSpPr>
+            <a:spLocks noGrp="1"/>
+          </p:cNvSpPr>
+          <p:nvPr>
+            <p:ph type="body" idx="1"/>
+          </p:nvPr>
+        </p:nvSpPr>
+        <p:spPr/>
+        <p:txBody>
+          <a:bodyPr/>
+          <a:lstStyle/>
+          <a:p>
+            <a:r>
+              <a:rPr lang="en-US" dirty="0"/>
+              <a:t>DALHIN · End-of-Lesson Snapshot (1 min) — PARTICIPANT GUIDE QUESTION. Balikan ang 1–10 self-rating sa umpisa. Iro-rate ulit — nagbago ba? Bakit?</a:t>
+            </a:r>
+          </a:p>
+          <a:p>
+            <a:r>
+              <a:rPr lang="en-US" dirty="0"/>
+              <a:t>Ito ang payoff ng PUKAW snapshot. Hindi tungkol sa mataas na numero — tungkol sa tapat na paglago at pag-asa sa grasya, hindi sa sariling lakas.</a:t>
+            </a:r>
+          </a:p>
+        </p:txBody>
+      </p:sp>
+      <p:sp>
+        <p:nvSpPr>
+          <p:cNvPr id="4" name="Slide Number Placeholder 3"/>
+          <p:cNvSpPr>
+            <a:spLocks noGrp="1"/>
+          </p:cNvSpPr>
+          <p:nvPr>
+            <p:ph type="sldNum" sz="quarter" idx="10"/>
+          </p:nvPr>
+        </p:nvSpPr>
+        <p:spPr/>
+        <p:txBody>
+          <a:bodyPr/>
+          <a:lstStyle/>
+          <a:p>
+            <a:fld id="{F7021451-1387-4CA6-816F-3879F97B5CBC}" type="slidenum">
+              <a:rPr lang="en-US"/>
+              <a:t>4</a:t>
             </a:fld>
             <a:endParaRPr lang="en-US"/>
           </a:p>
@@ -1309,9 +1854,20 @@
           <a:p>
             <a:r>
               <a:rPr lang="en-US" dirty="0"/>
-              <a:t>Read the ermine story slowly. Pause sa quote — let the absurdity of "maigi pang mamatay kesa marumihan" land. This is the emotional anchor for the lesson.</a:t>
-            </a:r>
-            <a:endParaRPr lang="en-US" dirty="0"/>
+              <a:t>TANAW · Story (4 min). Basahin nang malakas ang ermine story (USAD p.30). Kung may projector at internet, maikling winter-ermine video — pero hindi mandatory.</a:t>
+            </a:r>
+          </a:p>
+          <a:p>
+            <a:r>
+              <a:rPr lang="en-US" dirty="0"/>
+              <a:t>SCRIPT: "May hayop na maputi ang balahibo tuwing winter. Motto: 'dumihan mo na lahat — wag lang ang aking balat.' Ipinaglalaban nila 'yan ng patayan. Alam ito ng fur hunters — pinapahiran ng putik ang bahay-ermine; pag-uwi, nakikitang marumi na, 'di na pumapasok, mada-trap. Maigi pang mamatay kesa marumihan."</a:t>
+            </a:r>
+          </a:p>
+          <a:p>
+            <a:r>
+              <a:rPr lang="en-US" dirty="0"/>
+              <a:t>Pause sa quote — hayaang lumapat ang absurdity. Ito ang emotional anchor ng lesson.</a:t>
+            </a:r>
           </a:p>
         </p:txBody>
       </p:sp>
@@ -1397,9 +1953,20 @@
           <a:p>
             <a:r>
               <a:rPr lang="en-US" dirty="0"/>
-              <a:t>Open question — go around. 30-45 sec each. Common answers: importance of cleanliness, identity worth dying for, being set apart. Anchor to: "Our identity in Christ is our ermine-balat. Hindi paghaluan ng marumi."</a:t>
-            </a:r>
-            <a:endParaRPr lang="en-US" dirty="0"/>
+              <a:t>TANAW · Opening Q (4 min). PARTICIPANT GUIDE QUESTION. Iikot — bawat isa 30–45 seg lang.</a:t>
+            </a:r>
+          </a:p>
+          <a:p>
+            <a:r>
+              <a:rPr lang="en-US" dirty="0"/>
+              <a:t>Posibleng sagot: importante ang kalinisan; may bagay na worth dying for; hiwalay sa karumihan. Lahat puwedeng papasukin.</a:t>
+            </a:r>
+          </a:p>
+          <a:p>
+            <a:r>
+              <a:rPr lang="en-US" dirty="0"/>
+              <a:t>ANCHOR: "Yung identity nila, hindi nila pinakanasa — hindi pwedeng paghaluan ng marumi. Ganyan din ang identity natin kay Christ: banal, hiwalay para sa Kanya. Ang banal na pagkakakilanlan — yan ang ating ermine-balat."</a:t>
+            </a:r>
           </a:p>
         </p:txBody>
       </p:sp>
@@ -1485,9 +2052,14 @@
           <a:p>
             <a:r>
               <a:rPr lang="en-US" dirty="0"/>
-              <a:t>Read the Big Idea slowly. PAUSE. Don't elaborate yet. Let it land.</a:t>
-            </a:r>
-            <a:endParaRPr lang="en-US" dirty="0"/>
+              <a:t>TUKLAS · Big Idea (2 min). Basahin nang dahan-dahan. PAUSE. Huwag i-elaborate agad — hayaang lumapat.</a:t>
+            </a:r>
+          </a:p>
+          <a:p>
+            <a:r>
+              <a:rPr lang="en-US" dirty="0"/>
+              <a:t>BIG TRUTH: "Kung seryoso tayong umayon sa kabanalan, dapat seryoso rin tayong lumaban sa kasalanan." Bonhoeffer: "The Christian life is unending struggle against the flesh."</a:t>
+            </a:r>
           </a:p>
         </p:txBody>
       </p:sp>
@@ -1573,9 +2145,20 @@
           <a:p>
             <a:r>
               <a:rPr lang="en-US" dirty="0"/>
-              <a:t>The frame slide. Quote Bonhoeffer. Emphasis: holiness is not casual. The world celebrates sin and mocks holiness. We are at war.</a:t>
-            </a:r>
-            <a:endParaRPr lang="en-US" dirty="0"/>
+              <a:t>TUKLAS · The Frame. Playground vs battleground. Ang mundo, pinapalakpakan ang kasalanan, pinagtatawanan ang kabanalan. Malinaw ang utos: "Magpakabanal kayo, sapagkat ako'y banal."</a:t>
+            </a:r>
+          </a:p>
+          <a:p>
+            <a:r>
+              <a:rPr lang="en-US" dirty="0"/>
+              <a:t>SAINTS FRAMING: Kadesh (Hebrew) / Hagios (Greek) = HIWALAY. Hindi milagrosong tao sa rebulto — kundi anak ng Dios na hiwalay sa mundo at para sa Kanya. Coram Deo — nabubuhay sa presensya ng Dios.</a:t>
+            </a:r>
+          </a:p>
+          <a:p>
+            <a:r>
+              <a:rPr lang="en-US" dirty="0"/>
+              <a:t>PITFALL: Huwag tumagal sa 'saints' framing — baka mag-trigger ng Catholic-Protestant debate. Linawin lang: sa New Testament, 'saints' ang tawag sa LAHAT ng believers, hindi exclusive title ng iilan. Move on.</a:t>
+            </a:r>
           </a:p>
         </p:txBody>
       </p:sp>
@@ -1661,9 +2244,20 @@
           <a:p>
             <a:r>
               <a:rPr lang="en-US" dirty="0"/>
-              <a:t>3 ASPECTS — most important framework. Walk LEFT to RIGHT. ~45 sec per card. Emphasis on Progressive: "this is where we live. Positional perfect na. Perfect coming. Progressive — ngayon."</a:t>
-            </a:r>
-            <a:endParaRPr lang="en-US" dirty="0"/>
+              <a:t>TUKLAS · 3 Aspects (5 min) — pinaka-importanteng framework. Walk LEFT→RIGHT, ~1 min bawat card.</a:t>
+            </a:r>
+          </a:p>
+          <a:p>
+            <a:r>
+              <a:rPr lang="en-US" dirty="0"/>
+              <a:t>Positional (Heb 10:10) — iniligtas mula sa PENALTY. Perfect 10, lagi, dahil kay Christ. Progressive (1 Thess 4:3) — inililigtas mula sa POWER; day by day; ITO ang field natin. Perfect (Col 1:22) — ililigtas mula sa PRESENCE; pagdating ni Christ, face-to-face.</a:t>
+            </a:r>
+          </a:p>
+          <a:p>
+            <a:r>
+              <a:rPr lang="en-US" dirty="0"/>
+              <a:t>EMPHASIS: Lahat ng lesson na ito ay tungkol sa PROGRESSIVE — ang dito-at-ngayon. Hindi na kayang baguhin ang positional; hindi pa kayang akinin ang perfect.</a:t>
+            </a:r>
           </a:p>
         </p:txBody>
       </p:sp>
@@ -1749,9 +2343,14 @@
           <a:p>
             <a:r>
               <a:rPr lang="en-US" dirty="0"/>
-              <a:t>3 CALLS from 1 Peter 1. Quick walk-through (~30 sec each). The depth is in the workbook. You're showing the architecture.</a:t>
-            </a:r>
-            <a:endParaRPr lang="en-US" dirty="0"/>
+              <a:t>TUKLAS · 3 Calls mula sa 1 Peter 1 (~3 min). Quick walk-through — ang lalim ay nasa workbook; ipinapakita mo ang architecture.</a:t>
+            </a:r>
+          </a:p>
+          <a:p>
+            <a:r>
+              <a:rPr lang="en-US" dirty="0"/>
+              <a:t>Mapaghanda (v.13) — prepared mind; punuin ng godly influences, layuan ang basurang content. Masunurin (v.14,17) — obedience from relationship, hindi ritwal; mahalin ang Ama higit sa mundo. Matalino (v.18) — spiritual wisdom; pahalagahan ang sakripisyo ni Hesus, huwag bumalik sa 'suka.'</a:t>
+            </a:r>
           </a:p>
         </p:txBody>
       </p:sp>
@@ -1837,9 +2436,14 @@
           <a:p>
             <a:r>
               <a:rPr lang="en-US" dirty="0"/>
-              <a:t>5 AREAS — SRPIU. Acronym helps remember. Don't deep-dive into each — overview lang. Sa TALAKAY, dadako sa personal application.</a:t>
-            </a:r>
-            <a:endParaRPr lang="en-US" dirty="0"/>
+              <a:t>TUKLAS · 5 Areas — SRPIU (2 min). Overview lang, huwag i-detail one-by-one; nasa workbook ang detalye. Sa TALAKAY dadako ang personal application.</a:t>
+            </a:r>
+          </a:p>
+          <a:p>
+            <a:r>
+              <a:rPr lang="en-US" dirty="0"/>
+              <a:t>S · Sekswalidad (1 Cor 6:18) · R · Relasyon (2 Cor 6:14) · P · Pananalita (Eph 4:29, 5:4) · I · Pag-iisip (Col 3:2, Rom 12:2) · U · Ugali (Eph 4:32). "Magpakabanal sa LAHAT ng inyong ginagawa" — generally lahat; specifically, lima.</a:t>
+            </a:r>
           </a:p>
         </p:txBody>
       </p:sp>
@@ -2399,7 +3003,7 @@
                 <a:ea typeface="Calibri" pitchFamily="34" charset="-122"/>
                 <a:cs typeface="Calibri" pitchFamily="34" charset="-120"/>
               </a:rPr>
-              <a:t>1 / 16</a:t>
+              <a:t>1 / 21</a:t>
             </a:r>
             <a:endParaRPr lang="en-US" sz="900" dirty="0"/>
           </a:p>
@@ -2732,9 +3336,45 @@
                 <a:ea typeface="Calibri" pitchFamily="34" charset="-122"/>
                 <a:cs typeface="Calibri" pitchFamily="34" charset="-120"/>
               </a:rPr>
-              <a:t>10 / 16</a:t>
+              <a:t>11 / 21</a:t>
             </a:r>
             <a:endParaRPr lang="en-US" sz="900" dirty="0"/>
+          </a:p>
+        </p:txBody>
+      </p:sp>
+      <p:sp>
+        <p:nvSpPr>
+          <p:cNvPr id="900" name="added"/>
+          <p:cNvSpPr/>
+          <p:nvPr/>
+        </p:nvSpPr>
+        <p:spPr>
+          <a:xfrm>
+            <a:off x="4096000" y="6537960"/>
+            <a:ext cx="4000000" cy="365760"/>
+          </a:xfrm>
+          <a:prstGeom prst="rect">
+            <a:avLst/>
+          </a:prstGeom>
+          <a:noFill/>
+        </p:spPr>
+        <p:txBody>
+          <a:bodyPr wrap="square" anchor="ctr"/>
+          <a:lstStyle/>
+          <a:p>
+            <a:pPr algn="ctr" marL="0" indent="0">
+              <a:buNone/>
+            </a:pPr>
+            <a:r>
+              <a:rPr lang="en-US" sz="900" b="1" dirty="0">
+                <a:solidFill>
+                  <a:srgbClr val="D4A93F"/>
+                </a:solidFill>
+                <a:latin typeface="Calibri"/>
+                <a:cs typeface="Calibri"/>
+              </a:rPr>
+              <a:t>⏱ 2 min · ⌛29:00</a:t>
+            </a:r>
           </a:p>
         </p:txBody>
       </p:sp>
@@ -2803,7 +3443,7 @@
                 <a:ea typeface="Calibri" pitchFamily="34" charset="-122"/>
                 <a:cs typeface="Calibri" pitchFamily="34" charset="-120"/>
               </a:rPr>
-              <a:t>TALAKAY · 1 OF 2</a:t>
+              <a:t>📋 TALAKAY · 1 OF 2</a:t>
             </a:r>
             <a:endParaRPr lang="en-US" sz="1400" dirty="0"/>
           </a:p>
@@ -3002,9 +3642,45 @@
                 <a:ea typeface="Calibri" pitchFamily="34" charset="-122"/>
                 <a:cs typeface="Calibri" pitchFamily="34" charset="-120"/>
               </a:rPr>
-              <a:t>11 / 16</a:t>
+              <a:t>14 / 21</a:t>
             </a:r>
             <a:endParaRPr lang="en-US" sz="900" dirty="0"/>
+          </a:p>
+        </p:txBody>
+      </p:sp>
+      <p:sp>
+        <p:nvSpPr>
+          <p:cNvPr id="900" name="added"/>
+          <p:cNvSpPr/>
+          <p:nvPr/>
+        </p:nvSpPr>
+        <p:spPr>
+          <a:xfrm>
+            <a:off x="4096000" y="6537960"/>
+            <a:ext cx="4000000" cy="365760"/>
+          </a:xfrm>
+          <a:prstGeom prst="rect">
+            <a:avLst/>
+          </a:prstGeom>
+          <a:noFill/>
+        </p:spPr>
+        <p:txBody>
+          <a:bodyPr wrap="square" anchor="ctr"/>
+          <a:lstStyle/>
+          <a:p>
+            <a:pPr algn="ctr" marL="0" indent="0">
+              <a:buNone/>
+            </a:pPr>
+            <a:r>
+              <a:rPr lang="en-US" sz="900" b="1" dirty="0">
+                <a:solidFill>
+                  <a:srgbClr val="B8882A"/>
+                </a:solidFill>
+                <a:latin typeface="Calibri"/>
+                <a:cs typeface="Calibri"/>
+              </a:rPr>
+              <a:t>⏱ 6 min · ⌛37:00</a:t>
+            </a:r>
           </a:p>
         </p:txBody>
       </p:sp>
@@ -3073,7 +3749,7 @@
                 <a:ea typeface="Calibri" pitchFamily="34" charset="-122"/>
                 <a:cs typeface="Calibri" pitchFamily="34" charset="-120"/>
               </a:rPr>
-              <a:t>TALAKAY · 2 OF 2</a:t>
+              <a:t>📋 TALAKAY · 2 OF 2</a:t>
             </a:r>
             <a:endParaRPr lang="en-US" sz="1400" dirty="0"/>
           </a:p>
@@ -3272,9 +3948,45 @@
                 <a:ea typeface="Calibri" pitchFamily="34" charset="-122"/>
                 <a:cs typeface="Calibri" pitchFamily="34" charset="-120"/>
               </a:rPr>
-              <a:t>12 / 16</a:t>
+              <a:t>15 / 21</a:t>
             </a:r>
             <a:endParaRPr lang="en-US" sz="900" dirty="0"/>
+          </a:p>
+        </p:txBody>
+      </p:sp>
+      <p:sp>
+        <p:nvSpPr>
+          <p:cNvPr id="900" name="added"/>
+          <p:cNvSpPr/>
+          <p:nvPr/>
+        </p:nvSpPr>
+        <p:spPr>
+          <a:xfrm>
+            <a:off x="4096000" y="6537960"/>
+            <a:ext cx="4000000" cy="365760"/>
+          </a:xfrm>
+          <a:prstGeom prst="rect">
+            <a:avLst/>
+          </a:prstGeom>
+          <a:noFill/>
+        </p:spPr>
+        <p:txBody>
+          <a:bodyPr wrap="square" anchor="ctr"/>
+          <a:lstStyle/>
+          <a:p>
+            <a:pPr algn="ctr" marL="0" indent="0">
+              <a:buNone/>
+            </a:pPr>
+            <a:r>
+              <a:rPr lang="en-US" sz="900" b="1" dirty="0">
+                <a:solidFill>
+                  <a:srgbClr val="B8882A"/>
+                </a:solidFill>
+                <a:latin typeface="Calibri"/>
+                <a:cs typeface="Calibri"/>
+              </a:rPr>
+              <a:t>⏱ 6 min · ⌛43:00</a:t>
+            </a:r>
           </a:p>
         </p:txBody>
       </p:sp>
@@ -3532,9 +4244,45 @@
                 <a:ea typeface="Calibri" pitchFamily="34" charset="-122"/>
                 <a:cs typeface="Calibri" pitchFamily="34" charset="-120"/>
               </a:rPr>
-              <a:t>13 / 16</a:t>
+              <a:t>16 / 21</a:t>
             </a:r>
             <a:endParaRPr lang="en-US" sz="900" dirty="0"/>
+          </a:p>
+        </p:txBody>
+      </p:sp>
+      <p:sp>
+        <p:nvSpPr>
+          <p:cNvPr id="900" name="added"/>
+          <p:cNvSpPr/>
+          <p:nvPr/>
+        </p:nvSpPr>
+        <p:spPr>
+          <a:xfrm>
+            <a:off x="4096000" y="6537960"/>
+            <a:ext cx="4000000" cy="365760"/>
+          </a:xfrm>
+          <a:prstGeom prst="rect">
+            <a:avLst/>
+          </a:prstGeom>
+          <a:noFill/>
+        </p:spPr>
+        <p:txBody>
+          <a:bodyPr wrap="square" anchor="ctr"/>
+          <a:lstStyle/>
+          <a:p>
+            <a:pPr algn="ctr" marL="0" indent="0">
+              <a:buNone/>
+            </a:pPr>
+            <a:r>
+              <a:rPr lang="en-US" sz="900" b="1" dirty="0">
+                <a:solidFill>
+                  <a:srgbClr val="D4A93F"/>
+                </a:solidFill>
+                <a:latin typeface="Calibri"/>
+                <a:cs typeface="Calibri"/>
+              </a:rPr>
+              <a:t>⏱ 2 min · ⌛45:00</a:t>
+            </a:r>
           </a:p>
         </p:txBody>
       </p:sp>
@@ -3603,7 +4351,7 @@
                 <a:ea typeface="Calibri" pitchFamily="34" charset="-122"/>
                 <a:cs typeface="Calibri" pitchFamily="34" charset="-120"/>
               </a:rPr>
-              <a:t>5 MINUTOS NG TAHIMIK</a:t>
+              <a:t>📋 TUGON · PANALANGIN</a:t>
             </a:r>
             <a:endParaRPr lang="en-US" sz="1400" dirty="0"/>
           </a:p>
@@ -3759,9 +4507,45 @@
                 <a:ea typeface="Calibri" pitchFamily="34" charset="-122"/>
                 <a:cs typeface="Calibri" pitchFamily="34" charset="-120"/>
               </a:rPr>
-              <a:t>14 / 16</a:t>
+              <a:t>17 / 21</a:t>
             </a:r>
             <a:endParaRPr lang="en-US" sz="900" dirty="0"/>
+          </a:p>
+        </p:txBody>
+      </p:sp>
+      <p:sp>
+        <p:nvSpPr>
+          <p:cNvPr id="900" name="added"/>
+          <p:cNvSpPr/>
+          <p:nvPr/>
+        </p:nvSpPr>
+        <p:spPr>
+          <a:xfrm>
+            <a:off x="4096000" y="6537960"/>
+            <a:ext cx="4000000" cy="365760"/>
+          </a:xfrm>
+          <a:prstGeom prst="rect">
+            <a:avLst/>
+          </a:prstGeom>
+          <a:noFill/>
+        </p:spPr>
+        <p:txBody>
+          <a:bodyPr wrap="square" anchor="ctr"/>
+          <a:lstStyle/>
+          <a:p>
+            <a:pPr algn="ctr" marL="0" indent="0">
+              <a:buNone/>
+            </a:pPr>
+            <a:r>
+              <a:rPr lang="en-US" sz="900" b="1" dirty="0">
+                <a:solidFill>
+                  <a:srgbClr val="B8882A"/>
+                </a:solidFill>
+                <a:latin typeface="Calibri"/>
+                <a:cs typeface="Calibri"/>
+              </a:rPr>
+              <a:t>⏱ 5 min · ⌛50:00</a:t>
+            </a:r>
           </a:p>
         </p:txBody>
       </p:sp>
@@ -4116,9 +4900,45 @@
                 <a:ea typeface="Calibri" pitchFamily="34" charset="-122"/>
                 <a:cs typeface="Calibri" pitchFamily="34" charset="-120"/>
               </a:rPr>
-              <a:t>15 / 16</a:t>
+              <a:t>18 / 21</a:t>
             </a:r>
             <a:endParaRPr lang="en-US" sz="900" dirty="0"/>
+          </a:p>
+        </p:txBody>
+      </p:sp>
+      <p:sp>
+        <p:nvSpPr>
+          <p:cNvPr id="900" name="added"/>
+          <p:cNvSpPr/>
+          <p:nvPr/>
+        </p:nvSpPr>
+        <p:spPr>
+          <a:xfrm>
+            <a:off x="4096000" y="6537960"/>
+            <a:ext cx="4000000" cy="365760"/>
+          </a:xfrm>
+          <a:prstGeom prst="rect">
+            <a:avLst/>
+          </a:prstGeom>
+          <a:noFill/>
+        </p:spPr>
+        <p:txBody>
+          <a:bodyPr wrap="square" anchor="ctr"/>
+          <a:lstStyle/>
+          <a:p>
+            <a:pPr algn="ctr" marL="0" indent="0">
+              <a:buNone/>
+            </a:pPr>
+            <a:r>
+              <a:rPr lang="en-US" sz="900" b="1" dirty="0">
+                <a:solidFill>
+                  <a:srgbClr val="D4A93F"/>
+                </a:solidFill>
+                <a:latin typeface="Calibri"/>
+                <a:cs typeface="Calibri"/>
+              </a:rPr>
+              <a:t>⏱ 2 min · ⌛52:00</a:t>
+            </a:r>
           </a:p>
         </p:txBody>
       </p:sp>
@@ -4425,9 +5245,951 @@
                 <a:ea typeface="Calibri" pitchFamily="34" charset="-122"/>
                 <a:cs typeface="Calibri" pitchFamily="34" charset="-120"/>
               </a:rPr>
-              <a:t>16 / 16</a:t>
+              <a:t>21 / 21</a:t>
             </a:r>
             <a:endParaRPr lang="en-US" sz="900" dirty="0"/>
+          </a:p>
+        </p:txBody>
+      </p:sp>
+      <p:sp>
+        <p:nvSpPr>
+          <p:cNvPr id="900" name="added"/>
+          <p:cNvSpPr/>
+          <p:nvPr/>
+        </p:nvSpPr>
+        <p:spPr>
+          <a:xfrm>
+            <a:off x="4096000" y="6537960"/>
+            <a:ext cx="4000000" cy="365760"/>
+          </a:xfrm>
+          <a:prstGeom prst="rect">
+            <a:avLst/>
+          </a:prstGeom>
+          <a:noFill/>
+        </p:spPr>
+        <p:txBody>
+          <a:bodyPr wrap="square" anchor="ctr"/>
+          <a:lstStyle/>
+          <a:p>
+            <a:pPr algn="ctr" marL="0" indent="0">
+              <a:buNone/>
+            </a:pPr>
+            <a:r>
+              <a:rPr lang="en-US" sz="900" b="1" dirty="0">
+                <a:solidFill>
+                  <a:srgbClr val="D4A93F"/>
+                </a:solidFill>
+                <a:latin typeface="Calibri"/>
+                <a:cs typeface="Calibri"/>
+              </a:rPr>
+              <a:t>⏱ 1 min · ⌛55:00</a:t>
+            </a:r>
+          </a:p>
+        </p:txBody>
+      </p:sp>
+    </p:spTree>
+  </p:cSld>
+  <p:clrMapOvr>
+    <a:masterClrMapping/>
+  </p:clrMapOvr>
+</p:sld>
+</file>
+
+<file path=ppt/slides/slide17.xml><?xml version="1.0" encoding="utf-8"?>
+<p:sld xmlns:a="http://schemas.openxmlformats.org/drawingml/2006/main" xmlns:r="http://schemas.openxmlformats.org/officeDocument/2006/relationships" xmlns:p="http://schemas.openxmlformats.org/presentationml/2006/main">
+  <p:cSld name="Slide 4">
+    <p:bg>
+      <p:bgPr>
+        <a:solidFill>
+          <a:srgbClr val="FEF8E8"/>
+        </a:solidFill>
+      </p:bgPr>
+    </p:bg>
+    <p:spTree>
+      <p:nvGrpSpPr>
+        <p:cNvPr id="1" name=""/>
+        <p:cNvGrpSpPr/>
+        <p:nvPr/>
+      </p:nvGrpSpPr>
+      <p:grpSpPr>
+        <a:xfrm>
+          <a:off x="0" y="0"/>
+          <a:ext cx="0" cy="0"/>
+          <a:chOff x="0" y="0"/>
+          <a:chExt cx="0" cy="0"/>
+        </a:xfrm>
+      </p:grpSpPr>
+      <p:sp>
+        <p:nvSpPr>
+          <p:cNvPr id="2" name="Text 0"/>
+          <p:cNvSpPr/>
+          <p:nvPr/>
+        </p:nvSpPr>
+        <p:spPr>
+          <a:xfrm>
+            <a:off x="457200" y="1097280"/>
+            <a:ext cx="11274552" cy="365760"/>
+          </a:xfrm>
+          <a:prstGeom prst="rect">
+            <a:avLst/>
+          </a:prstGeom>
+          <a:noFill/>
+          <a:ln/>
+        </p:spPr>
+        <p:txBody>
+          <a:bodyPr wrap="square" rtlCol="0" anchor="ctr"/>
+          <a:lstStyle/>
+          <a:p>
+            <a:pPr algn="ctr" indent="0" marL="0">
+              <a:buNone/>
+            </a:pPr>
+            <a:r>
+              <a:rPr lang="en-US" sz="1400" b="1" spc="500" kern="0" dirty="0">
+                <a:solidFill>
+                  <a:srgbClr val="B8882A"/>
+                </a:solidFill>
+                <a:latin typeface="Calibri" pitchFamily="34" charset="0"/>
+                <a:ea typeface="Calibri" pitchFamily="34" charset="-122"/>
+                <a:cs typeface="Calibri" pitchFamily="34" charset="-120"/>
+              </a:rPr>
+              <a:t>📋 PUKAW · TANONG</a:t>
+            </a:r>
+            <a:endParaRPr lang="en-US" sz="1400" dirty="0"/>
+          </a:p>
+        </p:txBody>
+      </p:sp>
+      <p:sp>
+        <p:nvSpPr>
+          <p:cNvPr id="3" name="Shape 1"/>
+          <p:cNvSpPr/>
+          <p:nvPr/>
+        </p:nvSpPr>
+        <p:spPr>
+          <a:xfrm>
+            <a:off x="1371600" y="1828800"/>
+            <a:ext cx="9445752" cy="3657600"/>
+          </a:xfrm>
+          <a:prstGeom prst="roundRect">
+            <a:avLst>
+              <a:gd name="adj" fmla="val 4500"/>
+            </a:avLst>
+          </a:prstGeom>
+          <a:solidFill>
+            <a:srgbClr val="F5E4BC"/>
+          </a:solidFill>
+          <a:ln w="38100">
+            <a:solidFill>
+              <a:srgbClr val="B8882A"/>
+            </a:solidFill>
+            <a:prstDash val="solid"/>
+          </a:ln>
+        </p:spPr>
+      </p:sp>
+      <p:sp>
+        <p:nvSpPr>
+          <p:cNvPr id="4" name="Text 2"/>
+          <p:cNvSpPr/>
+          <p:nvPr/>
+        </p:nvSpPr>
+        <p:spPr>
+          <a:xfrm>
+            <a:off x="1371600" y="1828800"/>
+            <a:ext cx="9445752" cy="3657600"/>
+          </a:xfrm>
+          <a:prstGeom prst="rect">
+            <a:avLst/>
+          </a:prstGeom>
+          <a:noFill/>
+          <a:ln/>
+        </p:spPr>
+        <p:txBody>
+          <a:bodyPr wrap="square" rtlCol="0" anchor="ctr"/>
+          <a:lstStyle/>
+          <a:p>
+            <a:pPr algn="ctr" indent="0" marL="0">
+              <a:buNone/>
+            </a:pPr>
+            <a:r>
+              <a:rPr lang="en-US" sz="3600" b="1" dirty="0">
+                <a:solidFill>
+                  <a:srgbClr val="1E3A5F"/>
+                </a:solidFill>
+                <a:latin typeface="Georgia" pitchFamily="34" charset="0"/>
+                <a:ea typeface="Georgia" pitchFamily="34" charset="-122"/>
+                <a:cs typeface="Georgia" pitchFamily="34" charset="-120"/>
+              </a:rPr>
+              <a:t>Bakit ito ang rating mo?</a:t>
+            </a:r>
+          </a:p>
+          <a:p>
+            <a:pPr algn="ctr" indent="0" marL="0">
+              <a:buNone/>
+            </a:pPr>
+            <a:r>
+              <a:rPr lang="en-US" sz="3600" b="1" dirty="0">
+                <a:solidFill>
+                  <a:srgbClr val="1E3A5F"/>
+                </a:solidFill>
+                <a:latin typeface="Georgia" pitchFamily="34" charset="0"/>
+                <a:ea typeface="Georgia" pitchFamily="34" charset="-122"/>
+                <a:cs typeface="Georgia" pitchFamily="34" charset="-120"/>
+              </a:rPr>
+              <a:t>Anong kalagayan ng puso mo ngayon?</a:t>
+            </a:r>
+          </a:p>
+        </p:txBody>
+      </p:sp>
+      <p:sp>
+        <p:nvSpPr>
+          <p:cNvPr id="5" name="Text 3"/>
+          <p:cNvSpPr/>
+          <p:nvPr/>
+        </p:nvSpPr>
+        <p:spPr>
+          <a:xfrm>
+            <a:off x="365760" y="6537960"/>
+            <a:ext cx="3657600" cy="228600"/>
+          </a:xfrm>
+          <a:prstGeom prst="rect">
+            <a:avLst/>
+          </a:prstGeom>
+          <a:noFill/>
+          <a:ln/>
+        </p:spPr>
+        <p:txBody>
+          <a:bodyPr wrap="square" rtlCol="0" anchor="ctr"/>
+          <a:lstStyle/>
+          <a:p>
+            <a:pPr indent="0" marL="0">
+              <a:buNone/>
+            </a:pPr>
+            <a:r>
+              <a:rPr lang="en-US" sz="900" spc="150" kern="0" dirty="0">
+                <a:solidFill>
+                  <a:srgbClr val="4A5566"/>
+                </a:solidFill>
+                <a:latin typeface="Calibri" pitchFamily="34" charset="0"/>
+                <a:ea typeface="Calibri" pitchFamily="34" charset="-122"/>
+                <a:cs typeface="Calibri" pitchFamily="34" charset="-120"/>
+              </a:rPr>
+              <a:t>PUKAW</a:t>
+            </a:r>
+            <a:endParaRPr lang="en-US" sz="900" dirty="0"/>
+          </a:p>
+        </p:txBody>
+      </p:sp>
+      <p:sp>
+        <p:nvSpPr>
+          <p:cNvPr id="6" name="Text 4"/>
+          <p:cNvSpPr/>
+          <p:nvPr/>
+        </p:nvSpPr>
+        <p:spPr>
+          <a:xfrm>
+            <a:off x="10058400" y="6537960"/>
+            <a:ext cx="1828800" cy="228600"/>
+          </a:xfrm>
+          <a:prstGeom prst="rect">
+            <a:avLst/>
+          </a:prstGeom>
+          <a:noFill/>
+          <a:ln/>
+        </p:spPr>
+        <p:txBody>
+          <a:bodyPr wrap="square" rtlCol="0" anchor="ctr"/>
+          <a:lstStyle/>
+          <a:p>
+            <a:pPr algn="r" indent="0" marL="0">
+              <a:buNone/>
+            </a:pPr>
+            <a:r>
+              <a:rPr lang="en-US" sz="900" b="1" spc="150" kern="0" dirty="0">
+                <a:solidFill>
+                  <a:srgbClr val="4A5566"/>
+                </a:solidFill>
+                <a:latin typeface="Calibri" pitchFamily="34" charset="0"/>
+                <a:ea typeface="Calibri" pitchFamily="34" charset="-122"/>
+                <a:cs typeface="Calibri" pitchFamily="34" charset="-120"/>
+              </a:rPr>
+              <a:t>3 / 21</a:t>
+            </a:r>
+            <a:endParaRPr lang="en-US" sz="900" dirty="0"/>
+          </a:p>
+        </p:txBody>
+      </p:sp>
+      <p:sp>
+        <p:nvSpPr>
+          <p:cNvPr id="900" name="added"/>
+          <p:cNvSpPr/>
+          <p:nvPr/>
+        </p:nvSpPr>
+        <p:spPr>
+          <a:xfrm>
+            <a:off x="1371600" y="5240000"/>
+            <a:ext cx="9448800" cy="640080"/>
+          </a:xfrm>
+          <a:prstGeom prst="rect">
+            <a:avLst/>
+          </a:prstGeom>
+          <a:noFill/>
+        </p:spPr>
+        <p:txBody>
+          <a:bodyPr wrap="square" anchor="ctr"/>
+          <a:lstStyle/>
+          <a:p>
+            <a:pPr algn="ctr" marL="0" indent="0">
+              <a:buNone/>
+            </a:pPr>
+            <a:r>
+              <a:rPr lang="en-US" sz="1350" b="0" dirty="0" i="1">
+                <a:solidFill>
+                  <a:srgbClr val="B8882A"/>
+                </a:solidFill>
+                <a:latin typeface="Calibri"/>
+                <a:cs typeface="Calibri"/>
+              </a:rPr>
+              <a:t>Isulat sa Participant Guide — sariling pagninilay, hindi pa i-share.</a:t>
+            </a:r>
+          </a:p>
+        </p:txBody>
+      </p:sp>
+      <p:sp>
+        <p:nvSpPr>
+          <p:cNvPr id="900" name="added"/>
+          <p:cNvSpPr/>
+          <p:nvPr/>
+        </p:nvSpPr>
+        <p:spPr>
+          <a:xfrm>
+            <a:off x="4096000" y="6537960"/>
+            <a:ext cx="4000000" cy="365760"/>
+          </a:xfrm>
+          <a:prstGeom prst="rect">
+            <a:avLst/>
+          </a:prstGeom>
+          <a:noFill/>
+        </p:spPr>
+        <p:txBody>
+          <a:bodyPr wrap="square" anchor="ctr"/>
+          <a:lstStyle/>
+          <a:p>
+            <a:pPr algn="ctr" marL="0" indent="0">
+              <a:buNone/>
+            </a:pPr>
+            <a:r>
+              <a:rPr lang="en-US" sz="900" b="1" dirty="0">
+                <a:solidFill>
+                  <a:srgbClr val="B8882A"/>
+                </a:solidFill>
+                <a:latin typeface="Calibri"/>
+                <a:cs typeface="Calibri"/>
+              </a:rPr>
+              <a:t>⏱ 2 min · ⌛5:00</a:t>
+            </a:r>
+          </a:p>
+        </p:txBody>
+      </p:sp>
+    </p:spTree>
+  </p:cSld>
+  <p:clrMapOvr>
+    <a:masterClrMapping/>
+  </p:clrMapOvr>
+</p:sld>
+</file>
+
+<file path=ppt/slides/slide18.xml><?xml version="1.0" encoding="utf-8"?>
+<p:sld xmlns:a="http://schemas.openxmlformats.org/drawingml/2006/main" xmlns:r="http://schemas.openxmlformats.org/officeDocument/2006/relationships" xmlns:p="http://schemas.openxmlformats.org/presentationml/2006/main">
+  <p:cSld name="Slide 4">
+    <p:bg>
+      <p:bgPr>
+        <a:solidFill>
+          <a:srgbClr val="FEF8E8"/>
+        </a:solidFill>
+      </p:bgPr>
+    </p:bg>
+    <p:spTree>
+      <p:nvGrpSpPr>
+        <p:cNvPr id="1" name=""/>
+        <p:cNvGrpSpPr/>
+        <p:nvPr/>
+      </p:nvGrpSpPr>
+      <p:grpSpPr>
+        <a:xfrm>
+          <a:off x="0" y="0"/>
+          <a:ext cx="0" cy="0"/>
+          <a:chOff x="0" y="0"/>
+          <a:chExt cx="0" cy="0"/>
+        </a:xfrm>
+      </p:grpSpPr>
+      <p:sp>
+        <p:nvSpPr>
+          <p:cNvPr id="2" name="Text 0"/>
+          <p:cNvSpPr/>
+          <p:nvPr/>
+        </p:nvSpPr>
+        <p:spPr>
+          <a:xfrm>
+            <a:off x="457200" y="1097280"/>
+            <a:ext cx="11274552" cy="365760"/>
+          </a:xfrm>
+          <a:prstGeom prst="rect">
+            <a:avLst/>
+          </a:prstGeom>
+          <a:noFill/>
+          <a:ln/>
+        </p:spPr>
+        <p:txBody>
+          <a:bodyPr wrap="square" rtlCol="0" anchor="ctr"/>
+          <a:lstStyle/>
+          <a:p>
+            <a:pPr algn="ctr" indent="0" marL="0">
+              <a:buNone/>
+            </a:pPr>
+            <a:r>
+              <a:rPr lang="en-US" sz="1400" b="1" spc="500" kern="0" dirty="0">
+                <a:solidFill>
+                  <a:srgbClr val="B8882A"/>
+                </a:solidFill>
+                <a:latin typeface="Calibri" pitchFamily="34" charset="0"/>
+                <a:ea typeface="Calibri" pitchFamily="34" charset="-122"/>
+                <a:cs typeface="Calibri" pitchFamily="34" charset="-120"/>
+              </a:rPr>
+              <a:t>📋 TUKLAS · TANONG</a:t>
+            </a:r>
+            <a:endParaRPr lang="en-US" sz="1400" dirty="0"/>
+          </a:p>
+        </p:txBody>
+      </p:sp>
+      <p:sp>
+        <p:nvSpPr>
+          <p:cNvPr id="3" name="Shape 1"/>
+          <p:cNvSpPr/>
+          <p:nvPr/>
+        </p:nvSpPr>
+        <p:spPr>
+          <a:xfrm>
+            <a:off x="1371600" y="1828800"/>
+            <a:ext cx="9445752" cy="3657600"/>
+          </a:xfrm>
+          <a:prstGeom prst="roundRect">
+            <a:avLst>
+              <a:gd name="adj" fmla="val 4500"/>
+            </a:avLst>
+          </a:prstGeom>
+          <a:solidFill>
+            <a:srgbClr val="F5E4BC"/>
+          </a:solidFill>
+          <a:ln w="38100">
+            <a:solidFill>
+              <a:srgbClr val="B8882A"/>
+            </a:solidFill>
+            <a:prstDash val="solid"/>
+          </a:ln>
+        </p:spPr>
+      </p:sp>
+      <p:sp>
+        <p:nvSpPr>
+          <p:cNvPr id="4" name="Text 2"/>
+          <p:cNvSpPr/>
+          <p:nvPr/>
+        </p:nvSpPr>
+        <p:spPr>
+          <a:xfrm>
+            <a:off x="1371600" y="1828800"/>
+            <a:ext cx="9445752" cy="3657600"/>
+          </a:xfrm>
+          <a:prstGeom prst="rect">
+            <a:avLst/>
+          </a:prstGeom>
+          <a:noFill/>
+          <a:ln/>
+        </p:spPr>
+        <p:txBody>
+          <a:bodyPr wrap="square" rtlCol="0" anchor="ctr"/>
+          <a:lstStyle/>
+          <a:p>
+            <a:pPr algn="ctr" indent="0" marL="0">
+              <a:buNone/>
+            </a:pPr>
+            <a:r>
+              <a:rPr lang="en-US" sz="3600" b="1" dirty="0">
+                <a:solidFill>
+                  <a:srgbClr val="1E3A5F"/>
+                </a:solidFill>
+                <a:latin typeface="Georgia" pitchFamily="34" charset="0"/>
+                <a:ea typeface="Georgia" pitchFamily="34" charset="-122"/>
+                <a:cs typeface="Georgia" pitchFamily="34" charset="-120"/>
+              </a:rPr>
+              <a:t>Komportable ka bang tawaging</a:t>
+            </a:r>
+          </a:p>
+          <a:p>
+            <a:pPr algn="ctr" indent="0" marL="0">
+              <a:buNone/>
+            </a:pPr>
+            <a:r>
+              <a:rPr lang="en-US" sz="3600" b="1" dirty="0">
+                <a:solidFill>
+                  <a:srgbClr val="1E3A5F"/>
+                </a:solidFill>
+                <a:latin typeface="Georgia" pitchFamily="34" charset="0"/>
+                <a:ea typeface="Georgia" pitchFamily="34" charset="-122"/>
+                <a:cs typeface="Georgia" pitchFamily="34" charset="-120"/>
+              </a:rPr>
+              <a:t>"banal" (saint)? Bakit o bakit hindi?</a:t>
+            </a:r>
+          </a:p>
+        </p:txBody>
+      </p:sp>
+      <p:sp>
+        <p:nvSpPr>
+          <p:cNvPr id="5" name="Text 3"/>
+          <p:cNvSpPr/>
+          <p:nvPr/>
+        </p:nvSpPr>
+        <p:spPr>
+          <a:xfrm>
+            <a:off x="365760" y="6537960"/>
+            <a:ext cx="3657600" cy="228600"/>
+          </a:xfrm>
+          <a:prstGeom prst="rect">
+            <a:avLst/>
+          </a:prstGeom>
+          <a:noFill/>
+          <a:ln/>
+        </p:spPr>
+        <p:txBody>
+          <a:bodyPr wrap="square" rtlCol="0" anchor="ctr"/>
+          <a:lstStyle/>
+          <a:p>
+            <a:pPr indent="0" marL="0">
+              <a:buNone/>
+            </a:pPr>
+            <a:r>
+              <a:rPr lang="en-US" sz="900" spc="150" kern="0" dirty="0">
+                <a:solidFill>
+                  <a:srgbClr val="4A5566"/>
+                </a:solidFill>
+                <a:latin typeface="Calibri" pitchFamily="34" charset="0"/>
+                <a:ea typeface="Calibri" pitchFamily="34" charset="-122"/>
+                <a:cs typeface="Calibri" pitchFamily="34" charset="-120"/>
+              </a:rPr>
+              <a:t>TUKLAS</a:t>
+            </a:r>
+            <a:endParaRPr lang="en-US" sz="900" dirty="0"/>
+          </a:p>
+        </p:txBody>
+      </p:sp>
+      <p:sp>
+        <p:nvSpPr>
+          <p:cNvPr id="6" name="Text 4"/>
+          <p:cNvSpPr/>
+          <p:nvPr/>
+        </p:nvSpPr>
+        <p:spPr>
+          <a:xfrm>
+            <a:off x="10058400" y="6537960"/>
+            <a:ext cx="1828800" cy="228600"/>
+          </a:xfrm>
+          <a:prstGeom prst="rect">
+            <a:avLst/>
+          </a:prstGeom>
+          <a:noFill/>
+          <a:ln/>
+        </p:spPr>
+        <p:txBody>
+          <a:bodyPr wrap="square" rtlCol="0" anchor="ctr"/>
+          <a:lstStyle/>
+          <a:p>
+            <a:pPr algn="r" indent="0" marL="0">
+              <a:buNone/>
+            </a:pPr>
+            <a:r>
+              <a:rPr lang="en-US" sz="900" b="1" spc="150" kern="0" dirty="0">
+                <a:solidFill>
+                  <a:srgbClr val="4A5566"/>
+                </a:solidFill>
+                <a:latin typeface="Calibri" pitchFamily="34" charset="0"/>
+                <a:ea typeface="Calibri" pitchFamily="34" charset="-122"/>
+                <a:cs typeface="Calibri" pitchFamily="34" charset="-120"/>
+              </a:rPr>
+              <a:t>12 / 21</a:t>
+            </a:r>
+            <a:endParaRPr lang="en-US" sz="900" dirty="0"/>
+          </a:p>
+        </p:txBody>
+      </p:sp>
+      <p:sp>
+        <p:nvSpPr>
+          <p:cNvPr id="900" name="added"/>
+          <p:cNvSpPr/>
+          <p:nvPr/>
+        </p:nvSpPr>
+        <p:spPr>
+          <a:xfrm>
+            <a:off x="1371600" y="5240000"/>
+            <a:ext cx="9448800" cy="640080"/>
+          </a:xfrm>
+          <a:prstGeom prst="rect">
+            <a:avLst/>
+          </a:prstGeom>
+          <a:noFill/>
+        </p:spPr>
+        <p:txBody>
+          <a:bodyPr wrap="square" anchor="ctr"/>
+          <a:lstStyle/>
+          <a:p>
+            <a:pPr algn="ctr" marL="0" indent="0">
+              <a:buNone/>
+            </a:pPr>
+            <a:r>
+              <a:rPr lang="en-US" sz="1350" b="0" dirty="0" i="1">
+                <a:solidFill>
+                  <a:srgbClr val="B8882A"/>
+                </a:solidFill>
+                <a:latin typeface="Calibri"/>
+                <a:cs typeface="Calibri"/>
+              </a:rPr>
+              <a:t>Isulat sa Participant Guide — tapos 1–2 boluntaryong share.</a:t>
+            </a:r>
+          </a:p>
+        </p:txBody>
+      </p:sp>
+      <p:sp>
+        <p:nvSpPr>
+          <p:cNvPr id="900" name="added"/>
+          <p:cNvSpPr/>
+          <p:nvPr/>
+        </p:nvSpPr>
+        <p:spPr>
+          <a:xfrm>
+            <a:off x="4096000" y="6537960"/>
+            <a:ext cx="4000000" cy="365760"/>
+          </a:xfrm>
+          <a:prstGeom prst="rect">
+            <a:avLst/>
+          </a:prstGeom>
+          <a:noFill/>
+        </p:spPr>
+        <p:txBody>
+          <a:bodyPr wrap="square" anchor="ctr"/>
+          <a:lstStyle/>
+          <a:p>
+            <a:pPr algn="ctr" marL="0" indent="0">
+              <a:buNone/>
+            </a:pPr>
+            <a:r>
+              <a:rPr lang="en-US" sz="900" b="1" dirty="0">
+                <a:solidFill>
+                  <a:srgbClr val="B8882A"/>
+                </a:solidFill>
+                <a:latin typeface="Calibri"/>
+                <a:cs typeface="Calibri"/>
+              </a:rPr>
+              <a:t>⏱ 1 min · ⌛30:00</a:t>
+            </a:r>
+          </a:p>
+        </p:txBody>
+      </p:sp>
+    </p:spTree>
+  </p:cSld>
+  <p:clrMapOvr>
+    <a:masterClrMapping/>
+  </p:clrMapOvr>
+</p:sld>
+</file>
+
+<file path=ppt/slides/slide19.xml><?xml version="1.0" encoding="utf-8"?>
+<p:sld xmlns:a="http://schemas.openxmlformats.org/drawingml/2006/main" xmlns:r="http://schemas.openxmlformats.org/officeDocument/2006/relationships" xmlns:p="http://schemas.openxmlformats.org/presentationml/2006/main">
+  <p:cSld name="Slide 4">
+    <p:bg>
+      <p:bgPr>
+        <a:solidFill>
+          <a:srgbClr val="FEF8E8"/>
+        </a:solidFill>
+      </p:bgPr>
+    </p:bg>
+    <p:spTree>
+      <p:nvGrpSpPr>
+        <p:cNvPr id="1" name=""/>
+        <p:cNvGrpSpPr/>
+        <p:nvPr/>
+      </p:nvGrpSpPr>
+      <p:grpSpPr>
+        <a:xfrm>
+          <a:off x="0" y="0"/>
+          <a:ext cx="0" cy="0"/>
+          <a:chOff x="0" y="0"/>
+          <a:chExt cx="0" cy="0"/>
+        </a:xfrm>
+      </p:grpSpPr>
+      <p:sp>
+        <p:nvSpPr>
+          <p:cNvPr id="2" name="Text 0"/>
+          <p:cNvSpPr/>
+          <p:nvPr/>
+        </p:nvSpPr>
+        <p:spPr>
+          <a:xfrm>
+            <a:off x="457200" y="1097280"/>
+            <a:ext cx="11274552" cy="365760"/>
+          </a:xfrm>
+          <a:prstGeom prst="rect">
+            <a:avLst/>
+          </a:prstGeom>
+          <a:noFill/>
+          <a:ln/>
+        </p:spPr>
+        <p:txBody>
+          <a:bodyPr wrap="square" rtlCol="0" anchor="ctr"/>
+          <a:lstStyle/>
+          <a:p>
+            <a:pPr algn="ctr" indent="0" marL="0">
+              <a:buNone/>
+            </a:pPr>
+            <a:r>
+              <a:rPr lang="en-US" sz="1400" b="1" spc="500" kern="0" dirty="0">
+                <a:solidFill>
+                  <a:srgbClr val="B8882A"/>
+                </a:solidFill>
+                <a:latin typeface="Calibri" pitchFamily="34" charset="0"/>
+                <a:ea typeface="Calibri" pitchFamily="34" charset="-122"/>
+                <a:cs typeface="Calibri" pitchFamily="34" charset="-120"/>
+              </a:rPr>
+              <a:t>📋 TUKLAS · TANONG</a:t>
+            </a:r>
+            <a:endParaRPr lang="en-US" sz="1400" dirty="0"/>
+          </a:p>
+        </p:txBody>
+      </p:sp>
+      <p:sp>
+        <p:nvSpPr>
+          <p:cNvPr id="3" name="Shape 1"/>
+          <p:cNvSpPr/>
+          <p:nvPr/>
+        </p:nvSpPr>
+        <p:spPr>
+          <a:xfrm>
+            <a:off x="1371600" y="1828800"/>
+            <a:ext cx="9445752" cy="3657600"/>
+          </a:xfrm>
+          <a:prstGeom prst="roundRect">
+            <a:avLst>
+              <a:gd name="adj" fmla="val 4500"/>
+            </a:avLst>
+          </a:prstGeom>
+          <a:solidFill>
+            <a:srgbClr val="F5E4BC"/>
+          </a:solidFill>
+          <a:ln w="38100">
+            <a:solidFill>
+              <a:srgbClr val="B8882A"/>
+            </a:solidFill>
+            <a:prstDash val="solid"/>
+          </a:ln>
+        </p:spPr>
+      </p:sp>
+      <p:sp>
+        <p:nvSpPr>
+          <p:cNvPr id="4" name="Text 2"/>
+          <p:cNvSpPr/>
+          <p:nvPr/>
+        </p:nvSpPr>
+        <p:spPr>
+          <a:xfrm>
+            <a:off x="1371600" y="1828800"/>
+            <a:ext cx="9445752" cy="3657600"/>
+          </a:xfrm>
+          <a:prstGeom prst="rect">
+            <a:avLst/>
+          </a:prstGeom>
+          <a:noFill/>
+          <a:ln/>
+        </p:spPr>
+        <p:txBody>
+          <a:bodyPr wrap="square" rtlCol="0" anchor="ctr"/>
+          <a:lstStyle/>
+          <a:p>
+            <a:pPr algn="ctr" indent="0" marL="0">
+              <a:buNone/>
+            </a:pPr>
+            <a:r>
+              <a:rPr lang="en-US" sz="3600" b="1" dirty="0">
+                <a:solidFill>
+                  <a:srgbClr val="1E3A5F"/>
+                </a:solidFill>
+                <a:latin typeface="Georgia" pitchFamily="34" charset="0"/>
+                <a:ea typeface="Georgia" pitchFamily="34" charset="-122"/>
+                <a:cs typeface="Georgia" pitchFamily="34" charset="-120"/>
+              </a:rPr>
+              <a:t>Alin sa 5 areas (S·R·P·I·U) ang</a:t>
+            </a:r>
+          </a:p>
+          <a:p>
+            <a:pPr algn="ctr" indent="0" marL="0">
+              <a:buNone/>
+            </a:pPr>
+            <a:r>
+              <a:rPr lang="en-US" sz="3600" b="1" dirty="0">
+                <a:solidFill>
+                  <a:srgbClr val="1E3A5F"/>
+                </a:solidFill>
+                <a:latin typeface="Georgia" pitchFamily="34" charset="0"/>
+                <a:ea typeface="Georgia" pitchFamily="34" charset="-122"/>
+                <a:cs typeface="Georgia" pitchFamily="34" charset="-120"/>
+              </a:rPr>
+              <a:t>pinaka-kailangan ng grasya sa buhay mo?</a:t>
+            </a:r>
+          </a:p>
+        </p:txBody>
+      </p:sp>
+      <p:sp>
+        <p:nvSpPr>
+          <p:cNvPr id="5" name="Text 3"/>
+          <p:cNvSpPr/>
+          <p:nvPr/>
+        </p:nvSpPr>
+        <p:spPr>
+          <a:xfrm>
+            <a:off x="365760" y="6537960"/>
+            <a:ext cx="3657600" cy="228600"/>
+          </a:xfrm>
+          <a:prstGeom prst="rect">
+            <a:avLst/>
+          </a:prstGeom>
+          <a:noFill/>
+          <a:ln/>
+        </p:spPr>
+        <p:txBody>
+          <a:bodyPr wrap="square" rtlCol="0" anchor="ctr"/>
+          <a:lstStyle/>
+          <a:p>
+            <a:pPr indent="0" marL="0">
+              <a:buNone/>
+            </a:pPr>
+            <a:r>
+              <a:rPr lang="en-US" sz="900" spc="150" kern="0" dirty="0">
+                <a:solidFill>
+                  <a:srgbClr val="4A5566"/>
+                </a:solidFill>
+                <a:latin typeface="Calibri" pitchFamily="34" charset="0"/>
+                <a:ea typeface="Calibri" pitchFamily="34" charset="-122"/>
+                <a:cs typeface="Calibri" pitchFamily="34" charset="-120"/>
+              </a:rPr>
+              <a:t>TUKLAS</a:t>
+            </a:r>
+            <a:endParaRPr lang="en-US" sz="900" dirty="0"/>
+          </a:p>
+        </p:txBody>
+      </p:sp>
+      <p:sp>
+        <p:nvSpPr>
+          <p:cNvPr id="6" name="Text 4"/>
+          <p:cNvSpPr/>
+          <p:nvPr/>
+        </p:nvSpPr>
+        <p:spPr>
+          <a:xfrm>
+            <a:off x="10058400" y="6537960"/>
+            <a:ext cx="1828800" cy="228600"/>
+          </a:xfrm>
+          <a:prstGeom prst="rect">
+            <a:avLst/>
+          </a:prstGeom>
+          <a:noFill/>
+          <a:ln/>
+        </p:spPr>
+        <p:txBody>
+          <a:bodyPr wrap="square" rtlCol="0" anchor="ctr"/>
+          <a:lstStyle/>
+          <a:p>
+            <a:pPr algn="r" indent="0" marL="0">
+              <a:buNone/>
+            </a:pPr>
+            <a:r>
+              <a:rPr lang="en-US" sz="900" b="1" spc="150" kern="0" dirty="0">
+                <a:solidFill>
+                  <a:srgbClr val="4A5566"/>
+                </a:solidFill>
+                <a:latin typeface="Calibri" pitchFamily="34" charset="0"/>
+                <a:ea typeface="Calibri" pitchFamily="34" charset="-122"/>
+                <a:cs typeface="Calibri" pitchFamily="34" charset="-120"/>
+              </a:rPr>
+              <a:t>13 / 21</a:t>
+            </a:r>
+            <a:endParaRPr lang="en-US" sz="900" dirty="0"/>
+          </a:p>
+        </p:txBody>
+      </p:sp>
+      <p:sp>
+        <p:nvSpPr>
+          <p:cNvPr id="900" name="added"/>
+          <p:cNvSpPr/>
+          <p:nvPr/>
+        </p:nvSpPr>
+        <p:spPr>
+          <a:xfrm>
+            <a:off x="1371600" y="5240000"/>
+            <a:ext cx="9448800" cy="640080"/>
+          </a:xfrm>
+          <a:prstGeom prst="rect">
+            <a:avLst/>
+          </a:prstGeom>
+          <a:noFill/>
+        </p:spPr>
+        <p:txBody>
+          <a:bodyPr wrap="square" anchor="ctr"/>
+          <a:lstStyle/>
+          <a:p>
+            <a:pPr algn="ctr" marL="0" indent="0">
+              <a:buNone/>
+            </a:pPr>
+            <a:r>
+              <a:rPr lang="en-US" sz="1350" b="0" dirty="0" i="1">
+                <a:solidFill>
+                  <a:srgbClr val="B8882A"/>
+                </a:solidFill>
+                <a:latin typeface="Calibri"/>
+                <a:cs typeface="Calibri"/>
+              </a:rPr>
+              <a:t>Tahimik na isulat sa Participant Guide.</a:t>
+            </a:r>
+          </a:p>
+        </p:txBody>
+      </p:sp>
+      <p:sp>
+        <p:nvSpPr>
+          <p:cNvPr id="900" name="added"/>
+          <p:cNvSpPr/>
+          <p:nvPr/>
+        </p:nvSpPr>
+        <p:spPr>
+          <a:xfrm>
+            <a:off x="4096000" y="6537960"/>
+            <a:ext cx="4000000" cy="365760"/>
+          </a:xfrm>
+          <a:prstGeom prst="rect">
+            <a:avLst/>
+          </a:prstGeom>
+          <a:noFill/>
+        </p:spPr>
+        <p:txBody>
+          <a:bodyPr wrap="square" anchor="ctr"/>
+          <a:lstStyle/>
+          <a:p>
+            <a:pPr algn="ctr" marL="0" indent="0">
+              <a:buNone/>
+            </a:pPr>
+            <a:r>
+              <a:rPr lang="en-US" sz="900" b="1" dirty="0">
+                <a:solidFill>
+                  <a:srgbClr val="B8882A"/>
+                </a:solidFill>
+                <a:latin typeface="Calibri"/>
+                <a:cs typeface="Calibri"/>
+              </a:rPr>
+              <a:t>⏱ 1 min · ⌛31:00</a:t>
+            </a:r>
           </a:p>
         </p:txBody>
       </p:sp>
@@ -4719,9 +6481,665 @@
                 <a:ea typeface="Calibri" pitchFamily="34" charset="-122"/>
                 <a:cs typeface="Calibri" pitchFamily="34" charset="-120"/>
               </a:rPr>
-              <a:t>2 / 16</a:t>
+              <a:t>2 / 21</a:t>
             </a:r>
             <a:endParaRPr lang="en-US" sz="900" dirty="0"/>
+          </a:p>
+        </p:txBody>
+      </p:sp>
+      <p:sp>
+        <p:nvSpPr>
+          <p:cNvPr id="900" name="added"/>
+          <p:cNvSpPr/>
+          <p:nvPr/>
+        </p:nvSpPr>
+        <p:spPr>
+          <a:xfrm>
+            <a:off x="4096000" y="6537960"/>
+            <a:ext cx="4000000" cy="365760"/>
+          </a:xfrm>
+          <a:prstGeom prst="rect">
+            <a:avLst/>
+          </a:prstGeom>
+          <a:noFill/>
+        </p:spPr>
+        <p:txBody>
+          <a:bodyPr wrap="square" anchor="ctr"/>
+          <a:lstStyle/>
+          <a:p>
+            <a:pPr algn="ctr" marL="0" indent="0">
+              <a:buNone/>
+            </a:pPr>
+            <a:r>
+              <a:rPr lang="en-US" sz="900" b="1" dirty="0">
+                <a:solidFill>
+                  <a:srgbClr val="D4A93F"/>
+                </a:solidFill>
+                <a:latin typeface="Calibri"/>
+                <a:cs typeface="Calibri"/>
+              </a:rPr>
+              <a:t>⏱ 3 min · ⌛3:00</a:t>
+            </a:r>
+          </a:p>
+        </p:txBody>
+      </p:sp>
+    </p:spTree>
+  </p:cSld>
+  <p:clrMapOvr>
+    <a:masterClrMapping/>
+  </p:clrMapOvr>
+</p:sld>
+</file>
+
+<file path=ppt/slides/slide20.xml><?xml version="1.0" encoding="utf-8"?>
+<p:sld xmlns:a="http://schemas.openxmlformats.org/drawingml/2006/main" xmlns:r="http://schemas.openxmlformats.org/officeDocument/2006/relationships" xmlns:p="http://schemas.openxmlformats.org/presentationml/2006/main">
+  <p:cSld name="Slide 4">
+    <p:bg>
+      <p:bgPr>
+        <a:solidFill>
+          <a:srgbClr val="FEF8E8"/>
+        </a:solidFill>
+      </p:bgPr>
+    </p:bg>
+    <p:spTree>
+      <p:nvGrpSpPr>
+        <p:cNvPr id="1" name=""/>
+        <p:cNvGrpSpPr/>
+        <p:nvPr/>
+      </p:nvGrpSpPr>
+      <p:grpSpPr>
+        <a:xfrm>
+          <a:off x="0" y="0"/>
+          <a:ext cx="0" cy="0"/>
+          <a:chOff x="0" y="0"/>
+          <a:chExt cx="0" cy="0"/>
+        </a:xfrm>
+      </p:grpSpPr>
+      <p:sp>
+        <p:nvSpPr>
+          <p:cNvPr id="2" name="Text 0"/>
+          <p:cNvSpPr/>
+          <p:nvPr/>
+        </p:nvSpPr>
+        <p:spPr>
+          <a:xfrm>
+            <a:off x="457200" y="1097280"/>
+            <a:ext cx="11274552" cy="365760"/>
+          </a:xfrm>
+          <a:prstGeom prst="rect">
+            <a:avLst/>
+          </a:prstGeom>
+          <a:noFill/>
+          <a:ln/>
+        </p:spPr>
+        <p:txBody>
+          <a:bodyPr wrap="square" rtlCol="0" anchor="ctr"/>
+          <a:lstStyle/>
+          <a:p>
+            <a:pPr algn="ctr" indent="0" marL="0">
+              <a:buNone/>
+            </a:pPr>
+            <a:r>
+              <a:rPr lang="en-US" sz="1400" b="1" spc="500" kern="0" dirty="0">
+                <a:solidFill>
+                  <a:srgbClr val="B8882A"/>
+                </a:solidFill>
+                <a:latin typeface="Calibri" pitchFamily="34" charset="0"/>
+                <a:ea typeface="Calibri" pitchFamily="34" charset="-122"/>
+                <a:cs typeface="Calibri" pitchFamily="34" charset="-120"/>
+              </a:rPr>
+              <a:t>📋 DALHIN · EOLO</a:t>
+            </a:r>
+            <a:endParaRPr lang="en-US" sz="1400" dirty="0"/>
+          </a:p>
+        </p:txBody>
+      </p:sp>
+      <p:sp>
+        <p:nvSpPr>
+          <p:cNvPr id="3" name="Shape 1"/>
+          <p:cNvSpPr/>
+          <p:nvPr/>
+        </p:nvSpPr>
+        <p:spPr>
+          <a:xfrm>
+            <a:off x="1371600" y="1828800"/>
+            <a:ext cx="9445752" cy="3657600"/>
+          </a:xfrm>
+          <a:prstGeom prst="roundRect">
+            <a:avLst>
+              <a:gd name="adj" fmla="val 4500"/>
+            </a:avLst>
+          </a:prstGeom>
+          <a:solidFill>
+            <a:srgbClr val="F5E4BC"/>
+          </a:solidFill>
+          <a:ln w="38100">
+            <a:solidFill>
+              <a:srgbClr val="B8882A"/>
+            </a:solidFill>
+            <a:prstDash val="solid"/>
+          </a:ln>
+        </p:spPr>
+      </p:sp>
+      <p:sp>
+        <p:nvSpPr>
+          <p:cNvPr id="4" name="Text 2"/>
+          <p:cNvSpPr/>
+          <p:nvPr/>
+        </p:nvSpPr>
+        <p:spPr>
+          <a:xfrm>
+            <a:off x="1371600" y="1828800"/>
+            <a:ext cx="9445752" cy="3657600"/>
+          </a:xfrm>
+          <a:prstGeom prst="rect">
+            <a:avLst/>
+          </a:prstGeom>
+          <a:noFill/>
+          <a:ln/>
+        </p:spPr>
+        <p:txBody>
+          <a:bodyPr wrap="square" rtlCol="0" anchor="ctr"/>
+          <a:lstStyle/>
+          <a:p>
+            <a:pPr algn="ctr" indent="0" marL="0">
+              <a:buNone/>
+            </a:pPr>
+            <a:r>
+              <a:rPr lang="en-US" sz="3600" b="1" dirty="0">
+                <a:solidFill>
+                  <a:srgbClr val="1E3A5F"/>
+                </a:solidFill>
+                <a:latin typeface="Georgia" pitchFamily="34" charset="0"/>
+                <a:ea typeface="Georgia" pitchFamily="34" charset="-122"/>
+                <a:cs typeface="Georgia" pitchFamily="34" charset="-120"/>
+              </a:rPr>
+              <a:t>Sino ang taong ipinagdarasal mo sa EOLO?</a:t>
+            </a:r>
+          </a:p>
+          <a:p>
+            <a:pPr algn="ctr" indent="0" marL="0">
+              <a:buNone/>
+            </a:pPr>
+            <a:r>
+              <a:rPr lang="en-US" sz="3600" b="1" dirty="0">
+                <a:solidFill>
+                  <a:srgbClr val="1E3A5F"/>
+                </a:solidFill>
+                <a:latin typeface="Georgia" pitchFamily="34" charset="0"/>
+                <a:ea typeface="Georgia" pitchFamily="34" charset="-122"/>
+                <a:cs typeface="Georgia" pitchFamily="34" charset="-120"/>
+              </a:rPr>
+              <a:t>Paano nakakatulong ang holiness mo</a:t>
+            </a:r>
+          </a:p>
+          <a:p>
+            <a:pPr algn="ctr" indent="0" marL="0">
+              <a:buNone/>
+            </a:pPr>
+            <a:r>
+              <a:rPr lang="en-US" sz="3600" b="1" dirty="0">
+                <a:solidFill>
+                  <a:srgbClr val="1E3A5F"/>
+                </a:solidFill>
+                <a:latin typeface="Georgia" pitchFamily="34" charset="0"/>
+                <a:ea typeface="Georgia" pitchFamily="34" charset="-122"/>
+                <a:cs typeface="Georgia" pitchFamily="34" charset="-120"/>
+              </a:rPr>
+              <a:t>sa pagiging credible ng patotoo mo sa kanya?</a:t>
+            </a:r>
+          </a:p>
+        </p:txBody>
+      </p:sp>
+      <p:sp>
+        <p:nvSpPr>
+          <p:cNvPr id="5" name="Text 3"/>
+          <p:cNvSpPr/>
+          <p:nvPr/>
+        </p:nvSpPr>
+        <p:spPr>
+          <a:xfrm>
+            <a:off x="365760" y="6537960"/>
+            <a:ext cx="3657600" cy="228600"/>
+          </a:xfrm>
+          <a:prstGeom prst="rect">
+            <a:avLst/>
+          </a:prstGeom>
+          <a:noFill/>
+          <a:ln/>
+        </p:spPr>
+        <p:txBody>
+          <a:bodyPr wrap="square" rtlCol="0" anchor="ctr"/>
+          <a:lstStyle/>
+          <a:p>
+            <a:pPr indent="0" marL="0">
+              <a:buNone/>
+            </a:pPr>
+            <a:r>
+              <a:rPr lang="en-US" sz="900" spc="150" kern="0" dirty="0">
+                <a:solidFill>
+                  <a:srgbClr val="4A5566"/>
+                </a:solidFill>
+                <a:latin typeface="Calibri" pitchFamily="34" charset="0"/>
+                <a:ea typeface="Calibri" pitchFamily="34" charset="-122"/>
+                <a:cs typeface="Calibri" pitchFamily="34" charset="-120"/>
+              </a:rPr>
+              <a:t>DALHIN</a:t>
+            </a:r>
+            <a:endParaRPr lang="en-US" sz="900" dirty="0"/>
+          </a:p>
+        </p:txBody>
+      </p:sp>
+      <p:sp>
+        <p:nvSpPr>
+          <p:cNvPr id="6" name="Text 4"/>
+          <p:cNvSpPr/>
+          <p:nvPr/>
+        </p:nvSpPr>
+        <p:spPr>
+          <a:xfrm>
+            <a:off x="10058400" y="6537960"/>
+            <a:ext cx="1828800" cy="228600"/>
+          </a:xfrm>
+          <a:prstGeom prst="rect">
+            <a:avLst/>
+          </a:prstGeom>
+          <a:noFill/>
+          <a:ln/>
+        </p:spPr>
+        <p:txBody>
+          <a:bodyPr wrap="square" rtlCol="0" anchor="ctr"/>
+          <a:lstStyle/>
+          <a:p>
+            <a:pPr algn="r" indent="0" marL="0">
+              <a:buNone/>
+            </a:pPr>
+            <a:r>
+              <a:rPr lang="en-US" sz="900" b="1" spc="150" kern="0" dirty="0">
+                <a:solidFill>
+                  <a:srgbClr val="4A5566"/>
+                </a:solidFill>
+                <a:latin typeface="Calibri" pitchFamily="34" charset="0"/>
+                <a:ea typeface="Calibri" pitchFamily="34" charset="-122"/>
+                <a:cs typeface="Calibri" pitchFamily="34" charset="-120"/>
+              </a:rPr>
+              <a:t>19 / 21</a:t>
+            </a:r>
+            <a:endParaRPr lang="en-US" sz="900" dirty="0"/>
+          </a:p>
+        </p:txBody>
+      </p:sp>
+      <p:sp>
+        <p:nvSpPr>
+          <p:cNvPr id="900" name="added"/>
+          <p:cNvSpPr/>
+          <p:nvPr/>
+        </p:nvSpPr>
+        <p:spPr>
+          <a:xfrm>
+            <a:off x="1371600" y="5240000"/>
+            <a:ext cx="9448800" cy="640080"/>
+          </a:xfrm>
+          <a:prstGeom prst="rect">
+            <a:avLst/>
+          </a:prstGeom>
+          <a:noFill/>
+        </p:spPr>
+        <p:txBody>
+          <a:bodyPr wrap="square" anchor="ctr"/>
+          <a:lstStyle/>
+          <a:p>
+            <a:pPr algn="ctr" marL="0" indent="0">
+              <a:buNone/>
+            </a:pPr>
+            <a:r>
+              <a:rPr lang="en-US" sz="1350" b="0" dirty="0" i="1">
+                <a:solidFill>
+                  <a:srgbClr val="B8882A"/>
+                </a:solidFill>
+                <a:latin typeface="Calibri"/>
+                <a:cs typeface="Calibri"/>
+              </a:rPr>
+              <a:t>Isulat ang pangalan + maikling pagninilay sa Participant Guide.</a:t>
+            </a:r>
+          </a:p>
+        </p:txBody>
+      </p:sp>
+      <p:sp>
+        <p:nvSpPr>
+          <p:cNvPr id="900" name="added"/>
+          <p:cNvSpPr/>
+          <p:nvPr/>
+        </p:nvSpPr>
+        <p:spPr>
+          <a:xfrm>
+            <a:off x="4096000" y="6537960"/>
+            <a:ext cx="4000000" cy="365760"/>
+          </a:xfrm>
+          <a:prstGeom prst="rect">
+            <a:avLst/>
+          </a:prstGeom>
+          <a:noFill/>
+        </p:spPr>
+        <p:txBody>
+          <a:bodyPr wrap="square" anchor="ctr"/>
+          <a:lstStyle/>
+          <a:p>
+            <a:pPr algn="ctr" marL="0" indent="0">
+              <a:buNone/>
+            </a:pPr>
+            <a:r>
+              <a:rPr lang="en-US" sz="900" b="1" dirty="0">
+                <a:solidFill>
+                  <a:srgbClr val="B8882A"/>
+                </a:solidFill>
+                <a:latin typeface="Calibri"/>
+                <a:cs typeface="Calibri"/>
+              </a:rPr>
+              <a:t>⏱ 1 min · ⌛53:00</a:t>
+            </a:r>
+          </a:p>
+        </p:txBody>
+      </p:sp>
+    </p:spTree>
+  </p:cSld>
+  <p:clrMapOvr>
+    <a:masterClrMapping/>
+  </p:clrMapOvr>
+</p:sld>
+</file>
+
+<file path=ppt/slides/slide21.xml><?xml version="1.0" encoding="utf-8"?>
+<p:sld xmlns:a="http://schemas.openxmlformats.org/drawingml/2006/main" xmlns:r="http://schemas.openxmlformats.org/officeDocument/2006/relationships" xmlns:p="http://schemas.openxmlformats.org/presentationml/2006/main">
+  <p:cSld name="Slide 4">
+    <p:bg>
+      <p:bgPr>
+        <a:solidFill>
+          <a:srgbClr val="FEF8E8"/>
+        </a:solidFill>
+      </p:bgPr>
+    </p:bg>
+    <p:spTree>
+      <p:nvGrpSpPr>
+        <p:cNvPr id="1" name=""/>
+        <p:cNvGrpSpPr/>
+        <p:nvPr/>
+      </p:nvGrpSpPr>
+      <p:grpSpPr>
+        <a:xfrm>
+          <a:off x="0" y="0"/>
+          <a:ext cx="0" cy="0"/>
+          <a:chOff x="0" y="0"/>
+          <a:chExt cx="0" cy="0"/>
+        </a:xfrm>
+      </p:grpSpPr>
+      <p:sp>
+        <p:nvSpPr>
+          <p:cNvPr id="2" name="Text 0"/>
+          <p:cNvSpPr/>
+          <p:nvPr/>
+        </p:nvSpPr>
+        <p:spPr>
+          <a:xfrm>
+            <a:off x="457200" y="1097280"/>
+            <a:ext cx="11274552" cy="365760"/>
+          </a:xfrm>
+          <a:prstGeom prst="rect">
+            <a:avLst/>
+          </a:prstGeom>
+          <a:noFill/>
+          <a:ln/>
+        </p:spPr>
+        <p:txBody>
+          <a:bodyPr wrap="square" rtlCol="0" anchor="ctr"/>
+          <a:lstStyle/>
+          <a:p>
+            <a:pPr algn="ctr" indent="0" marL="0">
+              <a:buNone/>
+            </a:pPr>
+            <a:r>
+              <a:rPr lang="en-US" sz="1400" b="1" spc="500" kern="0" dirty="0">
+                <a:solidFill>
+                  <a:srgbClr val="B8882A"/>
+                </a:solidFill>
+                <a:latin typeface="Calibri" pitchFamily="34" charset="0"/>
+                <a:ea typeface="Calibri" pitchFamily="34" charset="-122"/>
+                <a:cs typeface="Calibri" pitchFamily="34" charset="-120"/>
+              </a:rPr>
+              <a:t>📋 DALHIN · END SNAPSHOT</a:t>
+            </a:r>
+            <a:endParaRPr lang="en-US" sz="1400" dirty="0"/>
+          </a:p>
+        </p:txBody>
+      </p:sp>
+      <p:sp>
+        <p:nvSpPr>
+          <p:cNvPr id="3" name="Shape 1"/>
+          <p:cNvSpPr/>
+          <p:nvPr/>
+        </p:nvSpPr>
+        <p:spPr>
+          <a:xfrm>
+            <a:off x="1371600" y="1828800"/>
+            <a:ext cx="9445752" cy="3657600"/>
+          </a:xfrm>
+          <a:prstGeom prst="roundRect">
+            <a:avLst>
+              <a:gd name="adj" fmla="val 4500"/>
+            </a:avLst>
+          </a:prstGeom>
+          <a:solidFill>
+            <a:srgbClr val="F5E4BC"/>
+          </a:solidFill>
+          <a:ln w="38100">
+            <a:solidFill>
+              <a:srgbClr val="B8882A"/>
+            </a:solidFill>
+            <a:prstDash val="solid"/>
+          </a:ln>
+        </p:spPr>
+      </p:sp>
+      <p:sp>
+        <p:nvSpPr>
+          <p:cNvPr id="4" name="Text 2"/>
+          <p:cNvSpPr/>
+          <p:nvPr/>
+        </p:nvSpPr>
+        <p:spPr>
+          <a:xfrm>
+            <a:off x="1371600" y="1828800"/>
+            <a:ext cx="9445752" cy="3657600"/>
+          </a:xfrm>
+          <a:prstGeom prst="rect">
+            <a:avLst/>
+          </a:prstGeom>
+          <a:noFill/>
+          <a:ln/>
+        </p:spPr>
+        <p:txBody>
+          <a:bodyPr wrap="square" rtlCol="0" anchor="ctr"/>
+          <a:lstStyle/>
+          <a:p>
+            <a:pPr algn="ctr" indent="0" marL="0">
+              <a:buNone/>
+            </a:pPr>
+            <a:r>
+              <a:rPr lang="en-US" sz="3600" b="1" dirty="0">
+                <a:solidFill>
+                  <a:srgbClr val="1E3A5F"/>
+                </a:solidFill>
+                <a:latin typeface="Georgia" pitchFamily="34" charset="0"/>
+                <a:ea typeface="Georgia" pitchFamily="34" charset="-122"/>
+                <a:cs typeface="Georgia" pitchFamily="34" charset="-120"/>
+              </a:rPr>
+              <a:t>Ngayon, paano mo ira-rate ang sarili mo?</a:t>
+            </a:r>
+          </a:p>
+          <a:p>
+            <a:pPr algn="ctr" indent="0" marL="0">
+              <a:buNone/>
+            </a:pPr>
+            <a:r>
+              <a:rPr lang="en-US" sz="3600" b="1" dirty="0">
+                <a:solidFill>
+                  <a:srgbClr val="1E3A5F"/>
+                </a:solidFill>
+                <a:latin typeface="Georgia" pitchFamily="34" charset="0"/>
+                <a:ea typeface="Georgia" pitchFamily="34" charset="-122"/>
+                <a:cs typeface="Georgia" pitchFamily="34" charset="-120"/>
+              </a:rPr>
+              <a:t>1–10 — ihambing sa PUKAW mo kanina.</a:t>
+            </a:r>
+          </a:p>
+        </p:txBody>
+      </p:sp>
+      <p:sp>
+        <p:nvSpPr>
+          <p:cNvPr id="5" name="Text 3"/>
+          <p:cNvSpPr/>
+          <p:nvPr/>
+        </p:nvSpPr>
+        <p:spPr>
+          <a:xfrm>
+            <a:off x="365760" y="6537960"/>
+            <a:ext cx="3657600" cy="228600"/>
+          </a:xfrm>
+          <a:prstGeom prst="rect">
+            <a:avLst/>
+          </a:prstGeom>
+          <a:noFill/>
+          <a:ln/>
+        </p:spPr>
+        <p:txBody>
+          <a:bodyPr wrap="square" rtlCol="0" anchor="ctr"/>
+          <a:lstStyle/>
+          <a:p>
+            <a:pPr indent="0" marL="0">
+              <a:buNone/>
+            </a:pPr>
+            <a:r>
+              <a:rPr lang="en-US" sz="900" spc="150" kern="0" dirty="0">
+                <a:solidFill>
+                  <a:srgbClr val="4A5566"/>
+                </a:solidFill>
+                <a:latin typeface="Calibri" pitchFamily="34" charset="0"/>
+                <a:ea typeface="Calibri" pitchFamily="34" charset="-122"/>
+                <a:cs typeface="Calibri" pitchFamily="34" charset="-120"/>
+              </a:rPr>
+              <a:t>DALHIN</a:t>
+            </a:r>
+            <a:endParaRPr lang="en-US" sz="900" dirty="0"/>
+          </a:p>
+        </p:txBody>
+      </p:sp>
+      <p:sp>
+        <p:nvSpPr>
+          <p:cNvPr id="6" name="Text 4"/>
+          <p:cNvSpPr/>
+          <p:nvPr/>
+        </p:nvSpPr>
+        <p:spPr>
+          <a:xfrm>
+            <a:off x="10058400" y="6537960"/>
+            <a:ext cx="1828800" cy="228600"/>
+          </a:xfrm>
+          <a:prstGeom prst="rect">
+            <a:avLst/>
+          </a:prstGeom>
+          <a:noFill/>
+          <a:ln/>
+        </p:spPr>
+        <p:txBody>
+          <a:bodyPr wrap="square" rtlCol="0" anchor="ctr"/>
+          <a:lstStyle/>
+          <a:p>
+            <a:pPr algn="r" indent="0" marL="0">
+              <a:buNone/>
+            </a:pPr>
+            <a:r>
+              <a:rPr lang="en-US" sz="900" b="1" spc="150" kern="0" dirty="0">
+                <a:solidFill>
+                  <a:srgbClr val="4A5566"/>
+                </a:solidFill>
+                <a:latin typeface="Calibri" pitchFamily="34" charset="0"/>
+                <a:ea typeface="Calibri" pitchFamily="34" charset="-122"/>
+                <a:cs typeface="Calibri" pitchFamily="34" charset="-120"/>
+              </a:rPr>
+              <a:t>20 / 21</a:t>
+            </a:r>
+            <a:endParaRPr lang="en-US" sz="900" dirty="0"/>
+          </a:p>
+        </p:txBody>
+      </p:sp>
+      <p:sp>
+        <p:nvSpPr>
+          <p:cNvPr id="900" name="added"/>
+          <p:cNvSpPr/>
+          <p:nvPr/>
+        </p:nvSpPr>
+        <p:spPr>
+          <a:xfrm>
+            <a:off x="1371600" y="5240000"/>
+            <a:ext cx="9448800" cy="640080"/>
+          </a:xfrm>
+          <a:prstGeom prst="rect">
+            <a:avLst/>
+          </a:prstGeom>
+          <a:noFill/>
+        </p:spPr>
+        <p:txBody>
+          <a:bodyPr wrap="square" anchor="ctr"/>
+          <a:lstStyle/>
+          <a:p>
+            <a:pPr algn="ctr" marL="0" indent="0">
+              <a:buNone/>
+            </a:pPr>
+            <a:r>
+              <a:rPr lang="en-US" sz="1350" b="0" dirty="0" i="1">
+                <a:solidFill>
+                  <a:srgbClr val="B8882A"/>
+                </a:solidFill>
+                <a:latin typeface="Calibri"/>
+                <a:cs typeface="Calibri"/>
+              </a:rPr>
+              <a:t>Balikan ang rating sa umpisa. Nagbago ba? Bakit?</a:t>
+            </a:r>
+          </a:p>
+        </p:txBody>
+      </p:sp>
+      <p:sp>
+        <p:nvSpPr>
+          <p:cNvPr id="900" name="added"/>
+          <p:cNvSpPr/>
+          <p:nvPr/>
+        </p:nvSpPr>
+        <p:spPr>
+          <a:xfrm>
+            <a:off x="4096000" y="6537960"/>
+            <a:ext cx="4000000" cy="365760"/>
+          </a:xfrm>
+          <a:prstGeom prst="rect">
+            <a:avLst/>
+          </a:prstGeom>
+          <a:noFill/>
+        </p:spPr>
+        <p:txBody>
+          <a:bodyPr wrap="square" anchor="ctr"/>
+          <a:lstStyle/>
+          <a:p>
+            <a:pPr algn="ctr" marL="0" indent="0">
+              <a:buNone/>
+            </a:pPr>
+            <a:r>
+              <a:rPr lang="en-US" sz="900" b="1" dirty="0">
+                <a:solidFill>
+                  <a:srgbClr val="B8882A"/>
+                </a:solidFill>
+                <a:latin typeface="Calibri"/>
+                <a:cs typeface="Calibri"/>
+              </a:rPr>
+              <a:t>⏱ 1 min · ⌛54:00</a:t>
+            </a:r>
           </a:p>
         </p:txBody>
       </p:sp>
@@ -5029,9 +7447,45 @@
                 <a:ea typeface="Calibri" pitchFamily="34" charset="-122"/>
                 <a:cs typeface="Calibri" pitchFamily="34" charset="-120"/>
               </a:rPr>
-              <a:t>3 / 16</a:t>
+              <a:t>4 / 21</a:t>
             </a:r>
             <a:endParaRPr lang="en-US" sz="900" dirty="0"/>
+          </a:p>
+        </p:txBody>
+      </p:sp>
+      <p:sp>
+        <p:nvSpPr>
+          <p:cNvPr id="900" name="added"/>
+          <p:cNvSpPr/>
+          <p:nvPr/>
+        </p:nvSpPr>
+        <p:spPr>
+          <a:xfrm>
+            <a:off x="4096000" y="6537960"/>
+            <a:ext cx="4000000" cy="365760"/>
+          </a:xfrm>
+          <a:prstGeom prst="rect">
+            <a:avLst/>
+          </a:prstGeom>
+          <a:noFill/>
+        </p:spPr>
+        <p:txBody>
+          <a:bodyPr wrap="square" anchor="ctr"/>
+          <a:lstStyle/>
+          <a:p>
+            <a:pPr algn="ctr" marL="0" indent="0">
+              <a:buNone/>
+            </a:pPr>
+            <a:r>
+              <a:rPr lang="en-US" sz="900" b="1" dirty="0">
+                <a:solidFill>
+                  <a:srgbClr val="B8882A"/>
+                </a:solidFill>
+                <a:latin typeface="Calibri"/>
+                <a:cs typeface="Calibri"/>
+              </a:rPr>
+              <a:t>⏱ 4 min · ⌛9:00</a:t>
+            </a:r>
           </a:p>
         </p:txBody>
       </p:sp>
@@ -5100,7 +7554,7 @@
                 <a:ea typeface="Calibri" pitchFamily="34" charset="-122"/>
                 <a:cs typeface="Calibri" pitchFamily="34" charset="-120"/>
               </a:rPr>
-              <a:t>REFLECT</a:t>
+              <a:t>📋 REFLECT · TANONG</a:t>
             </a:r>
             <a:endParaRPr lang="en-US" sz="1400" dirty="0"/>
           </a:p>
@@ -5260,9 +7714,45 @@
                 <a:ea typeface="Calibri" pitchFamily="34" charset="-122"/>
                 <a:cs typeface="Calibri" pitchFamily="34" charset="-120"/>
               </a:rPr>
-              <a:t>4 / 16</a:t>
+              <a:t>5 / 21</a:t>
             </a:r>
             <a:endParaRPr lang="en-US" sz="900" dirty="0"/>
+          </a:p>
+        </p:txBody>
+      </p:sp>
+      <p:sp>
+        <p:nvSpPr>
+          <p:cNvPr id="900" name="added"/>
+          <p:cNvSpPr/>
+          <p:nvPr/>
+        </p:nvSpPr>
+        <p:spPr>
+          <a:xfrm>
+            <a:off x="4096000" y="6537960"/>
+            <a:ext cx="4000000" cy="365760"/>
+          </a:xfrm>
+          <a:prstGeom prst="rect">
+            <a:avLst/>
+          </a:prstGeom>
+          <a:noFill/>
+        </p:spPr>
+        <p:txBody>
+          <a:bodyPr wrap="square" anchor="ctr"/>
+          <a:lstStyle/>
+          <a:p>
+            <a:pPr algn="ctr" marL="0" indent="0">
+              <a:buNone/>
+            </a:pPr>
+            <a:r>
+              <a:rPr lang="en-US" sz="900" b="1" dirty="0">
+                <a:solidFill>
+                  <a:srgbClr val="B8882A"/>
+                </a:solidFill>
+                <a:latin typeface="Calibri"/>
+                <a:cs typeface="Calibri"/>
+              </a:rPr>
+              <a:t>⏱ 4 min · ⌛13:00</a:t>
+            </a:r>
           </a:p>
         </p:txBody>
       </p:sp>
@@ -5524,9 +8014,45 @@
                 <a:ea typeface="Calibri" pitchFamily="34" charset="-122"/>
                 <a:cs typeface="Calibri" pitchFamily="34" charset="-120"/>
               </a:rPr>
-              <a:t>5 / 16</a:t>
+              <a:t>6 / 21</a:t>
             </a:r>
             <a:endParaRPr lang="en-US" sz="900" dirty="0"/>
+          </a:p>
+        </p:txBody>
+      </p:sp>
+      <p:sp>
+        <p:nvSpPr>
+          <p:cNvPr id="900" name="added"/>
+          <p:cNvSpPr/>
+          <p:nvPr/>
+        </p:nvSpPr>
+        <p:spPr>
+          <a:xfrm>
+            <a:off x="4096000" y="6537960"/>
+            <a:ext cx="4000000" cy="365760"/>
+          </a:xfrm>
+          <a:prstGeom prst="rect">
+            <a:avLst/>
+          </a:prstGeom>
+          <a:noFill/>
+        </p:spPr>
+        <p:txBody>
+          <a:bodyPr wrap="square" anchor="ctr"/>
+          <a:lstStyle/>
+          <a:p>
+            <a:pPr algn="ctr" marL="0" indent="0">
+              <a:buNone/>
+            </a:pPr>
+            <a:r>
+              <a:rPr lang="en-US" sz="900" b="1" dirty="0">
+                <a:solidFill>
+                  <a:srgbClr val="D4A93F"/>
+                </a:solidFill>
+                <a:latin typeface="Calibri"/>
+                <a:cs typeface="Calibri"/>
+              </a:rPr>
+              <a:t>⏱ 2 min · ⌛15:00</a:t>
+            </a:r>
           </a:p>
         </p:txBody>
       </p:sp>
@@ -5836,9 +8362,45 @@
                 <a:ea typeface="Calibri" pitchFamily="34" charset="-122"/>
                 <a:cs typeface="Calibri" pitchFamily="34" charset="-120"/>
               </a:rPr>
-              <a:t>6 / 16</a:t>
+              <a:t>7 / 21</a:t>
             </a:r>
             <a:endParaRPr lang="en-US" sz="900" dirty="0"/>
+          </a:p>
+        </p:txBody>
+      </p:sp>
+      <p:sp>
+        <p:nvSpPr>
+          <p:cNvPr id="900" name="added"/>
+          <p:cNvSpPr/>
+          <p:nvPr/>
+        </p:nvSpPr>
+        <p:spPr>
+          <a:xfrm>
+            <a:off x="4096000" y="6537960"/>
+            <a:ext cx="4000000" cy="365760"/>
+          </a:xfrm>
+          <a:prstGeom prst="rect">
+            <a:avLst/>
+          </a:prstGeom>
+          <a:noFill/>
+        </p:spPr>
+        <p:txBody>
+          <a:bodyPr wrap="square" anchor="ctr"/>
+          <a:lstStyle/>
+          <a:p>
+            <a:pPr algn="ctr" marL="0" indent="0">
+              <a:buNone/>
+            </a:pPr>
+            <a:r>
+              <a:rPr lang="en-US" sz="900" b="1" dirty="0">
+                <a:solidFill>
+                  <a:srgbClr val="D4A93F"/>
+                </a:solidFill>
+                <a:latin typeface="Calibri"/>
+                <a:cs typeface="Calibri"/>
+              </a:rPr>
+              <a:t>⏱ 2 min · ⌛17:00</a:t>
+            </a:r>
           </a:p>
         </p:txBody>
       </p:sp>
@@ -6741,9 +9303,45 @@
                 <a:ea typeface="Calibri" pitchFamily="34" charset="-122"/>
                 <a:cs typeface="Calibri" pitchFamily="34" charset="-120"/>
               </a:rPr>
-              <a:t>7 / 16</a:t>
+              <a:t>8 / 21</a:t>
             </a:r>
             <a:endParaRPr lang="en-US" sz="900" dirty="0"/>
+          </a:p>
+        </p:txBody>
+      </p:sp>
+      <p:sp>
+        <p:nvSpPr>
+          <p:cNvPr id="900" name="added"/>
+          <p:cNvSpPr/>
+          <p:nvPr/>
+        </p:nvSpPr>
+        <p:spPr>
+          <a:xfrm>
+            <a:off x="4096000" y="6537960"/>
+            <a:ext cx="4000000" cy="365760"/>
+          </a:xfrm>
+          <a:prstGeom prst="rect">
+            <a:avLst/>
+          </a:prstGeom>
+          <a:noFill/>
+        </p:spPr>
+        <p:txBody>
+          <a:bodyPr wrap="square" anchor="ctr"/>
+          <a:lstStyle/>
+          <a:p>
+            <a:pPr algn="ctr" marL="0" indent="0">
+              <a:buNone/>
+            </a:pPr>
+            <a:r>
+              <a:rPr lang="en-US" sz="900" b="1" dirty="0">
+                <a:solidFill>
+                  <a:srgbClr val="B8882A"/>
+                </a:solidFill>
+                <a:latin typeface="Calibri"/>
+                <a:cs typeface="Calibri"/>
+              </a:rPr>
+              <a:t>⏱ 5 min · ⌛22:00</a:t>
+            </a:r>
           </a:p>
         </p:txBody>
       </p:sp>
@@ -7361,9 +9959,45 @@
                 <a:ea typeface="Calibri" pitchFamily="34" charset="-122"/>
                 <a:cs typeface="Calibri" pitchFamily="34" charset="-120"/>
               </a:rPr>
-              <a:t>8 / 16</a:t>
+              <a:t>9 / 21</a:t>
             </a:r>
             <a:endParaRPr lang="en-US" sz="900" dirty="0"/>
+          </a:p>
+        </p:txBody>
+      </p:sp>
+      <p:sp>
+        <p:nvSpPr>
+          <p:cNvPr id="900" name="added"/>
+          <p:cNvSpPr/>
+          <p:nvPr/>
+        </p:nvSpPr>
+        <p:spPr>
+          <a:xfrm>
+            <a:off x="4096000" y="6537960"/>
+            <a:ext cx="4000000" cy="365760"/>
+          </a:xfrm>
+          <a:prstGeom prst="rect">
+            <a:avLst/>
+          </a:prstGeom>
+          <a:noFill/>
+        </p:spPr>
+        <p:txBody>
+          <a:bodyPr wrap="square" anchor="ctr"/>
+          <a:lstStyle/>
+          <a:p>
+            <a:pPr algn="ctr" marL="0" indent="0">
+              <a:buNone/>
+            </a:pPr>
+            <a:r>
+              <a:rPr lang="en-US" sz="900" b="1" dirty="0">
+                <a:solidFill>
+                  <a:srgbClr val="B8882A"/>
+                </a:solidFill>
+                <a:latin typeface="Calibri"/>
+                <a:cs typeface="Calibri"/>
+              </a:rPr>
+              <a:t>⏱ 3 min · ⌛25:00</a:t>
+            </a:r>
           </a:p>
         </p:txBody>
       </p:sp>
@@ -8308,9 +10942,45 @@
                 <a:ea typeface="Calibri" pitchFamily="34" charset="-122"/>
                 <a:cs typeface="Calibri" pitchFamily="34" charset="-120"/>
               </a:rPr>
-              <a:t>9 / 16</a:t>
+              <a:t>10 / 21</a:t>
             </a:r>
             <a:endParaRPr lang="en-US" sz="900" dirty="0"/>
+          </a:p>
+        </p:txBody>
+      </p:sp>
+      <p:sp>
+        <p:nvSpPr>
+          <p:cNvPr id="900" name="added"/>
+          <p:cNvSpPr/>
+          <p:nvPr/>
+        </p:nvSpPr>
+        <p:spPr>
+          <a:xfrm>
+            <a:off x="4096000" y="6537960"/>
+            <a:ext cx="4000000" cy="365760"/>
+          </a:xfrm>
+          <a:prstGeom prst="rect">
+            <a:avLst/>
+          </a:prstGeom>
+          <a:noFill/>
+        </p:spPr>
+        <p:txBody>
+          <a:bodyPr wrap="square" anchor="ctr"/>
+          <a:lstStyle/>
+          <a:p>
+            <a:pPr algn="ctr" marL="0" indent="0">
+              <a:buNone/>
+            </a:pPr>
+            <a:r>
+              <a:rPr lang="en-US" sz="900" b="1" dirty="0">
+                <a:solidFill>
+                  <a:srgbClr val="D4A93F"/>
+                </a:solidFill>
+                <a:latin typeface="Calibri"/>
+                <a:cs typeface="Calibri"/>
+              </a:rPr>
+              <a:t>⏱ 2 min · ⌛27:00</a:t>
+            </a:r>
           </a:p>
         </p:txBody>
       </p:sp>
